--- a/colorchecker_light_calibraiton.pptx
+++ b/colorchecker_light_calibraiton.pptx
@@ -13,6 +13,7 @@
     <p:sldId id="261" r:id="rId7"/>
     <p:sldId id="262" r:id="rId8"/>
     <p:sldId id="263" r:id="rId9"/>
+    <p:sldId id="264" r:id="rId10"/>
   </p:sldIdLst>
   <p:sldSz cx="12192000" cy="6858000"/>
   <p:notesSz cx="6858000" cy="9144000"/>
@@ -111,6 +112,11 @@
       </a:defRPr>
     </a:lvl9pPr>
   </p:defaultTextStyle>
+  <p:extLst>
+    <p:ext uri="{EFAFB233-063F-42B5-8137-9DF3F51BA10A}">
+      <p15:sldGuideLst xmlns:p15="http://schemas.microsoft.com/office/powerpoint/2012/main"/>
+    </p:ext>
+  </p:extLst>
 </p:presentation>
 </file>
 
@@ -261,7 +267,7 @@
           <a:p>
             <a:fld id="{CDD09523-012A-4FD0-904B-354D5A41C033}" type="datetimeFigureOut">
               <a:rPr lang="ko-KR" altLang="en-US" smtClean="0"/>
-              <a:t>2026-08-25</a:t>
+              <a:t>2026-09-02</a:t>
             </a:fld>
             <a:endParaRPr lang="ko-KR" altLang="en-US"/>
           </a:p>
@@ -459,7 +465,7 @@
           <a:p>
             <a:fld id="{CDD09523-012A-4FD0-904B-354D5A41C033}" type="datetimeFigureOut">
               <a:rPr lang="ko-KR" altLang="en-US" smtClean="0"/>
-              <a:t>2026-08-25</a:t>
+              <a:t>2026-09-02</a:t>
             </a:fld>
             <a:endParaRPr lang="ko-KR" altLang="en-US"/>
           </a:p>
@@ -667,7 +673,7 @@
           <a:p>
             <a:fld id="{CDD09523-012A-4FD0-904B-354D5A41C033}" type="datetimeFigureOut">
               <a:rPr lang="ko-KR" altLang="en-US" smtClean="0"/>
-              <a:t>2026-08-25</a:t>
+              <a:t>2026-09-02</a:t>
             </a:fld>
             <a:endParaRPr lang="ko-KR" altLang="en-US"/>
           </a:p>
@@ -865,7 +871,7 @@
           <a:p>
             <a:fld id="{CDD09523-012A-4FD0-904B-354D5A41C033}" type="datetimeFigureOut">
               <a:rPr lang="ko-KR" altLang="en-US" smtClean="0"/>
-              <a:t>2026-08-25</a:t>
+              <a:t>2026-09-02</a:t>
             </a:fld>
             <a:endParaRPr lang="ko-KR" altLang="en-US"/>
           </a:p>
@@ -1140,7 +1146,7 @@
           <a:p>
             <a:fld id="{CDD09523-012A-4FD0-904B-354D5A41C033}" type="datetimeFigureOut">
               <a:rPr lang="ko-KR" altLang="en-US" smtClean="0"/>
-              <a:t>2026-08-25</a:t>
+              <a:t>2026-09-02</a:t>
             </a:fld>
             <a:endParaRPr lang="ko-KR" altLang="en-US"/>
           </a:p>
@@ -1405,7 +1411,7 @@
           <a:p>
             <a:fld id="{CDD09523-012A-4FD0-904B-354D5A41C033}" type="datetimeFigureOut">
               <a:rPr lang="ko-KR" altLang="en-US" smtClean="0"/>
-              <a:t>2026-08-25</a:t>
+              <a:t>2026-09-02</a:t>
             </a:fld>
             <a:endParaRPr lang="ko-KR" altLang="en-US"/>
           </a:p>
@@ -1817,7 +1823,7 @@
           <a:p>
             <a:fld id="{CDD09523-012A-4FD0-904B-354D5A41C033}" type="datetimeFigureOut">
               <a:rPr lang="ko-KR" altLang="en-US" smtClean="0"/>
-              <a:t>2026-08-25</a:t>
+              <a:t>2026-09-02</a:t>
             </a:fld>
             <a:endParaRPr lang="ko-KR" altLang="en-US"/>
           </a:p>
@@ -1958,7 +1964,7 @@
           <a:p>
             <a:fld id="{CDD09523-012A-4FD0-904B-354D5A41C033}" type="datetimeFigureOut">
               <a:rPr lang="ko-KR" altLang="en-US" smtClean="0"/>
-              <a:t>2026-08-25</a:t>
+              <a:t>2026-09-02</a:t>
             </a:fld>
             <a:endParaRPr lang="ko-KR" altLang="en-US"/>
           </a:p>
@@ -2071,7 +2077,7 @@
           <a:p>
             <a:fld id="{CDD09523-012A-4FD0-904B-354D5A41C033}" type="datetimeFigureOut">
               <a:rPr lang="ko-KR" altLang="en-US" smtClean="0"/>
-              <a:t>2026-08-25</a:t>
+              <a:t>2026-09-02</a:t>
             </a:fld>
             <a:endParaRPr lang="ko-KR" altLang="en-US"/>
           </a:p>
@@ -2382,7 +2388,7 @@
           <a:p>
             <a:fld id="{CDD09523-012A-4FD0-904B-354D5A41C033}" type="datetimeFigureOut">
               <a:rPr lang="ko-KR" altLang="en-US" smtClean="0"/>
-              <a:t>2026-08-25</a:t>
+              <a:t>2026-09-02</a:t>
             </a:fld>
             <a:endParaRPr lang="ko-KR" altLang="en-US"/>
           </a:p>
@@ -2670,7 +2676,7 @@
           <a:p>
             <a:fld id="{CDD09523-012A-4FD0-904B-354D5A41C033}" type="datetimeFigureOut">
               <a:rPr lang="ko-KR" altLang="en-US" smtClean="0"/>
-              <a:t>2026-08-25</a:t>
+              <a:t>2026-09-02</a:t>
             </a:fld>
             <a:endParaRPr lang="ko-KR" altLang="en-US"/>
           </a:p>
@@ -2911,7 +2917,7 @@
           <a:p>
             <a:fld id="{CDD09523-012A-4FD0-904B-354D5A41C033}" type="datetimeFigureOut">
               <a:rPr lang="ko-KR" altLang="en-US" smtClean="0"/>
-              <a:t>2026-08-25</a:t>
+              <a:t>2026-09-02</a:t>
             </a:fld>
             <a:endParaRPr lang="ko-KR" altLang="en-US"/>
           </a:p>
@@ -4715,6 +4721,995 @@
 </p:sld>
 </file>
 
+<file path=ppt/slides/slide9.xml><?xml version="1.0" encoding="utf-8"?>
+<p:sld xmlns:a="http://schemas.openxmlformats.org/drawingml/2006/main" xmlns:r="http://schemas.openxmlformats.org/officeDocument/2006/relationships" xmlns:p="http://schemas.openxmlformats.org/presentationml/2006/main">
+  <p:cSld>
+    <p:spTree>
+      <p:nvGrpSpPr>
+        <p:cNvPr id="1" name="">
+          <a:extLst>
+            <a:ext uri="{FF2B5EF4-FFF2-40B4-BE49-F238E27FC236}">
+              <a16:creationId xmlns:a16="http://schemas.microsoft.com/office/drawing/2014/main" id="{F7CCC8AF-740A-7E09-7E4B-3F5B1DFFC8F2}"/>
+            </a:ext>
+          </a:extLst>
+        </p:cNvPr>
+        <p:cNvGrpSpPr/>
+        <p:nvPr/>
+      </p:nvGrpSpPr>
+      <p:grpSpPr>
+        <a:xfrm>
+          <a:off x="0" y="0"/>
+          <a:ext cx="0" cy="0"/>
+          <a:chOff x="0" y="0"/>
+          <a:chExt cx="0" cy="0"/>
+        </a:xfrm>
+      </p:grpSpPr>
+      <p:sp>
+        <p:nvSpPr>
+          <p:cNvPr id="7" name="TextBox 6">
+            <a:extLst>
+              <a:ext uri="{FF2B5EF4-FFF2-40B4-BE49-F238E27FC236}">
+                <a16:creationId xmlns:a16="http://schemas.microsoft.com/office/drawing/2014/main" id="{D89FAA7B-CB06-6634-5A5A-B11D484C43CA}"/>
+              </a:ext>
+            </a:extLst>
+          </p:cNvPr>
+          <p:cNvSpPr txBox="1"/>
+          <p:nvPr/>
+        </p:nvSpPr>
+        <p:spPr>
+          <a:xfrm>
+            <a:off x="338203" y="180257"/>
+            <a:ext cx="6983260" cy="8863965"/>
+          </a:xfrm>
+          <a:prstGeom prst="rect">
+            <a:avLst/>
+          </a:prstGeom>
+          <a:noFill/>
+        </p:spPr>
+        <p:txBody>
+          <a:bodyPr wrap="square" rtlCol="0">
+            <a:spAutoFit/>
+          </a:bodyPr>
+          <a:lstStyle/>
+          <a:p>
+            <a:r>
+              <a:rPr lang="en-US" altLang="ko-KR" sz="1200"/>
+              <a:t>1) </a:t>
+            </a:r>
+            <a:r>
+              <a:rPr lang="ko-KR" altLang="en-US" sz="1200"/>
+              <a:t>조명 조건 고정</a:t>
+            </a:r>
+            <a:r>
+              <a:rPr lang="en-US" altLang="ko-KR" sz="1200"/>
+              <a:t>(RGBWI) – Godox Physical light</a:t>
+            </a:r>
+          </a:p>
+          <a:p>
+            <a:pPr marL="285750" indent="-285750">
+              <a:buFontTx/>
+              <a:buChar char="-"/>
+            </a:pPr>
+            <a:r>
+              <a:rPr lang="en-US" altLang="ko-KR" sz="1200">
+                <a:highlight>
+                  <a:srgbClr val="FFFF00"/>
+                </a:highlight>
+              </a:rPr>
+              <a:t>Red</a:t>
+            </a:r>
+            <a:br>
+              <a:rPr lang="en-US" altLang="ko-KR" sz="1200">
+                <a:highlight>
+                  <a:srgbClr val="FFFF00"/>
+                </a:highlight>
+              </a:rPr>
+            </a:br>
+            <a:r>
+              <a:rPr lang="en-US" altLang="ko-KR" sz="1200">
+                <a:highlight>
+                  <a:srgbClr val="FFFF00"/>
+                </a:highlight>
+              </a:rPr>
+              <a:t>[255, 0, 0, 0, 85], [255, 0, 0, 0, 170], [255, 0, 0, 0, 255]</a:t>
+            </a:r>
+          </a:p>
+          <a:p>
+            <a:pPr marL="285750" indent="-285750">
+              <a:buFontTx/>
+              <a:buChar char="-"/>
+            </a:pPr>
+            <a:r>
+              <a:rPr lang="en-US" altLang="ko-KR" sz="1200">
+                <a:highlight>
+                  <a:srgbClr val="FFFF00"/>
+                </a:highlight>
+              </a:rPr>
+              <a:t>Green</a:t>
+            </a:r>
+            <a:br>
+              <a:rPr lang="en-US" altLang="ko-KR" sz="1200">
+                <a:highlight>
+                  <a:srgbClr val="FFFF00"/>
+                </a:highlight>
+              </a:rPr>
+            </a:br>
+            <a:r>
+              <a:rPr lang="en-US" altLang="ko-KR" sz="1200">
+                <a:highlight>
+                  <a:srgbClr val="FFFF00"/>
+                </a:highlight>
+              </a:rPr>
+              <a:t>[0, 255, 0, 0, 85], [0, 255, 0, 0, 170], [0, 255, 0, 0, 255]</a:t>
+            </a:r>
+          </a:p>
+          <a:p>
+            <a:pPr marL="285750" indent="-285750">
+              <a:buFontTx/>
+              <a:buChar char="-"/>
+            </a:pPr>
+            <a:r>
+              <a:rPr lang="en-US" altLang="ko-KR" sz="1200">
+                <a:highlight>
+                  <a:srgbClr val="FFFF00"/>
+                </a:highlight>
+              </a:rPr>
+              <a:t>Blue</a:t>
+            </a:r>
+            <a:br>
+              <a:rPr lang="en-US" altLang="ko-KR" sz="1200">
+                <a:highlight>
+                  <a:srgbClr val="FFFF00"/>
+                </a:highlight>
+              </a:rPr>
+            </a:br>
+            <a:r>
+              <a:rPr lang="en-US" altLang="ko-KR" sz="1200">
+                <a:highlight>
+                  <a:srgbClr val="FFFF00"/>
+                </a:highlight>
+              </a:rPr>
+              <a:t>[0, 0, 255, 0, 85], [0, 0, 255, 0, 170], [0, 0, 255, 0, 255]</a:t>
+            </a:r>
+          </a:p>
+          <a:p>
+            <a:pPr marL="285750" indent="-285750">
+              <a:buFontTx/>
+              <a:buChar char="-"/>
+            </a:pPr>
+            <a:r>
+              <a:rPr lang="en-US" altLang="ko-KR" sz="1200">
+                <a:highlight>
+                  <a:srgbClr val="FFFF00"/>
+                </a:highlight>
+              </a:rPr>
+              <a:t>Yellow</a:t>
+            </a:r>
+            <a:br>
+              <a:rPr lang="en-US" altLang="ko-KR" sz="1200">
+                <a:highlight>
+                  <a:srgbClr val="FFFF00"/>
+                </a:highlight>
+              </a:rPr>
+            </a:br>
+            <a:r>
+              <a:rPr lang="en-US" altLang="ko-KR" sz="1200">
+                <a:highlight>
+                  <a:srgbClr val="FFFF00"/>
+                </a:highlight>
+              </a:rPr>
+              <a:t>[128, 128, 0, 0, 85], [128, 128, 0, 0, 170], [128, 128, 0, 0, 255]</a:t>
+            </a:r>
+          </a:p>
+          <a:p>
+            <a:pPr marL="285750" indent="-285750">
+              <a:buFontTx/>
+              <a:buChar char="-"/>
+            </a:pPr>
+            <a:r>
+              <a:rPr lang="en-US" altLang="ko-KR" sz="1200">
+                <a:highlight>
+                  <a:srgbClr val="FFFF00"/>
+                </a:highlight>
+              </a:rPr>
+              <a:t>Cyan</a:t>
+            </a:r>
+            <a:br>
+              <a:rPr lang="en-US" altLang="ko-KR" sz="1200">
+                <a:highlight>
+                  <a:srgbClr val="FFFF00"/>
+                </a:highlight>
+              </a:rPr>
+            </a:br>
+            <a:r>
+              <a:rPr lang="en-US" altLang="ko-KR" sz="1200">
+                <a:highlight>
+                  <a:srgbClr val="FFFF00"/>
+                </a:highlight>
+              </a:rPr>
+              <a:t>[0, 128, 128, 0, 85], [0, 128, 128, 0, 170], [0, 128, 128, 0, 255]</a:t>
+            </a:r>
+          </a:p>
+          <a:p>
+            <a:pPr marL="285750" indent="-285750">
+              <a:buFontTx/>
+              <a:buChar char="-"/>
+            </a:pPr>
+            <a:r>
+              <a:rPr lang="en-US" altLang="ko-KR" sz="1200">
+                <a:highlight>
+                  <a:srgbClr val="FFFF00"/>
+                </a:highlight>
+              </a:rPr>
+              <a:t>Magenta</a:t>
+            </a:r>
+            <a:br>
+              <a:rPr lang="en-US" altLang="ko-KR" sz="1200">
+                <a:highlight>
+                  <a:srgbClr val="FFFF00"/>
+                </a:highlight>
+              </a:rPr>
+            </a:br>
+            <a:r>
+              <a:rPr lang="en-US" altLang="ko-KR" sz="1200">
+                <a:highlight>
+                  <a:srgbClr val="FFFF00"/>
+                </a:highlight>
+              </a:rPr>
+              <a:t>[128, 0, 128, 0, 85], [128, 0, 128, 0, 170], [128, 0, 128, 0, 255] </a:t>
+            </a:r>
+          </a:p>
+          <a:p>
+            <a:pPr marL="285750" indent="-285750">
+              <a:buFontTx/>
+              <a:buChar char="-"/>
+            </a:pPr>
+            <a:r>
+              <a:rPr lang="en-US" altLang="ko-KR" sz="1200">
+                <a:highlight>
+                  <a:srgbClr val="FFFF00"/>
+                </a:highlight>
+              </a:rPr>
+              <a:t>White</a:t>
+            </a:r>
+            <a:br>
+              <a:rPr lang="en-US" altLang="ko-KR" sz="1200">
+                <a:highlight>
+                  <a:srgbClr val="FFFF00"/>
+                </a:highlight>
+              </a:rPr>
+            </a:br>
+            <a:r>
+              <a:rPr lang="en-US" altLang="ko-KR" sz="1200">
+                <a:highlight>
+                  <a:srgbClr val="FFFF00"/>
+                </a:highlight>
+              </a:rPr>
+              <a:t>[255, 255, 255, 0, 85], [255, 255, 255, 0, 170], [255, 255, 255, 0, 255]</a:t>
+            </a:r>
+          </a:p>
+          <a:p>
+            <a:pPr marL="285750" indent="-285750">
+              <a:buFontTx/>
+              <a:buChar char="-"/>
+            </a:pPr>
+            <a:r>
+              <a:rPr lang="en-US" altLang="ko-KR" sz="1200">
+                <a:highlight>
+                  <a:srgbClr val="FFFF00"/>
+                </a:highlight>
+              </a:rPr>
+              <a:t>Orange</a:t>
+            </a:r>
+            <a:br>
+              <a:rPr lang="en-US" altLang="ko-KR" sz="1200">
+                <a:highlight>
+                  <a:srgbClr val="FFFF00"/>
+                </a:highlight>
+              </a:rPr>
+            </a:br>
+            <a:r>
+              <a:rPr lang="en-US" altLang="ko-KR" sz="1200">
+                <a:highlight>
+                  <a:srgbClr val="FFFF00"/>
+                </a:highlight>
+              </a:rPr>
+              <a:t>[255, 128, 0, 0, 85], [255, 128, 0, 0, 170], [255, 128, 0, 0, 255]</a:t>
+            </a:r>
+          </a:p>
+          <a:p>
+            <a:pPr marL="285750" indent="-285750">
+              <a:buFontTx/>
+              <a:buChar char="-"/>
+            </a:pPr>
+            <a:r>
+              <a:rPr lang="en-US" altLang="ko-KR" sz="1200">
+                <a:highlight>
+                  <a:srgbClr val="FFFF00"/>
+                </a:highlight>
+              </a:rPr>
+              <a:t>Purple</a:t>
+            </a:r>
+            <a:br>
+              <a:rPr lang="en-US" altLang="ko-KR" sz="1200">
+                <a:highlight>
+                  <a:srgbClr val="FFFF00"/>
+                </a:highlight>
+              </a:rPr>
+            </a:br>
+            <a:r>
+              <a:rPr lang="en-US" altLang="ko-KR" sz="1200">
+                <a:highlight>
+                  <a:srgbClr val="FFFF00"/>
+                </a:highlight>
+              </a:rPr>
+              <a:t>[128, 0, 255, 0, 85], [128, 0, 255, 0, 170], [128, 0, 255, 0, 255]</a:t>
+            </a:r>
+          </a:p>
+          <a:p>
+            <a:pPr marL="285750" indent="-285750">
+              <a:buFontTx/>
+              <a:buChar char="-"/>
+            </a:pPr>
+            <a:r>
+              <a:rPr lang="en-US" altLang="ko-KR" sz="1200">
+                <a:highlight>
+                  <a:srgbClr val="FFFF00"/>
+                </a:highlight>
+              </a:rPr>
+              <a:t>Yellow-Green</a:t>
+            </a:r>
+            <a:br>
+              <a:rPr lang="en-US" altLang="ko-KR" sz="1200">
+                <a:highlight>
+                  <a:srgbClr val="FFFF00"/>
+                </a:highlight>
+              </a:rPr>
+            </a:br>
+            <a:r>
+              <a:rPr lang="ko-KR" altLang="ko-KR" sz="1200">
+                <a:highlight>
+                  <a:srgbClr val="FFFF00"/>
+                </a:highlight>
+              </a:rPr>
+              <a:t>[128, 255, 0</a:t>
+            </a:r>
+            <a:r>
+              <a:rPr lang="en-US" altLang="ko-KR" sz="1200">
+                <a:highlight>
+                  <a:srgbClr val="FFFF00"/>
+                </a:highlight>
+              </a:rPr>
+              <a:t>, 0, 85</a:t>
+            </a:r>
+            <a:r>
+              <a:rPr lang="ko-KR" altLang="ko-KR" sz="1200">
+                <a:highlight>
+                  <a:srgbClr val="FFFF00"/>
+                </a:highlight>
+              </a:rPr>
+              <a:t>]</a:t>
+            </a:r>
+            <a:r>
+              <a:rPr lang="en-US" altLang="ko-KR" sz="1200">
+                <a:highlight>
+                  <a:srgbClr val="FFFF00"/>
+                </a:highlight>
+              </a:rPr>
+              <a:t>, </a:t>
+            </a:r>
+            <a:r>
+              <a:rPr lang="ko-KR" altLang="ko-KR" sz="1200">
+                <a:highlight>
+                  <a:srgbClr val="FFFF00"/>
+                </a:highlight>
+              </a:rPr>
+              <a:t>[128, 255, 0</a:t>
+            </a:r>
+            <a:r>
+              <a:rPr lang="en-US" altLang="ko-KR" sz="1200">
+                <a:highlight>
+                  <a:srgbClr val="FFFF00"/>
+                </a:highlight>
+              </a:rPr>
+              <a:t>, 0, 170], </a:t>
+            </a:r>
+            <a:r>
+              <a:rPr lang="ko-KR" altLang="ko-KR" sz="1200">
+                <a:highlight>
+                  <a:srgbClr val="FFFF00"/>
+                </a:highlight>
+              </a:rPr>
+              <a:t>[128, 255, 0</a:t>
+            </a:r>
+            <a:r>
+              <a:rPr lang="en-US" altLang="ko-KR" sz="1200">
+                <a:highlight>
+                  <a:srgbClr val="FFFF00"/>
+                </a:highlight>
+              </a:rPr>
+              <a:t>, 0, 255]</a:t>
+            </a:r>
+          </a:p>
+          <a:p>
+            <a:pPr marL="285750" indent="-285750">
+              <a:buFontTx/>
+              <a:buChar char="-"/>
+            </a:pPr>
+            <a:r>
+              <a:rPr lang="en-US" altLang="ko-KR" sz="1200"/>
+              <a:t>Blue-cyan</a:t>
+            </a:r>
+            <a:br>
+              <a:rPr lang="en-US" altLang="ko-KR" sz="1200"/>
+            </a:br>
+            <a:r>
+              <a:rPr lang="ko-KR" altLang="ko-KR" sz="1200"/>
+              <a:t>[0, 128, 255</a:t>
+            </a:r>
+            <a:r>
+              <a:rPr lang="en-US" altLang="ko-KR" sz="1200"/>
+              <a:t>0, 85</a:t>
+            </a:r>
+            <a:r>
+              <a:rPr lang="ko-KR" altLang="ko-KR" sz="1200"/>
+              <a:t>]</a:t>
+            </a:r>
+            <a:r>
+              <a:rPr lang="en-US" altLang="ko-KR" sz="1200"/>
+              <a:t>, </a:t>
+            </a:r>
+            <a:r>
+              <a:rPr lang="ko-KR" altLang="ko-KR" sz="1200"/>
+              <a:t>[0</a:t>
+            </a:r>
+            <a:r>
+              <a:rPr lang="ko-KR" altLang="ko-KR" sz="1200">
+                <a:highlight>
+                  <a:srgbClr val="FFFF00"/>
+                </a:highlight>
+              </a:rPr>
+              <a:t>, 128, 255</a:t>
+            </a:r>
+            <a:r>
+              <a:rPr lang="en-US" altLang="ko-KR" sz="1200">
+                <a:highlight>
+                  <a:srgbClr val="FFFF00"/>
+                </a:highlight>
+              </a:rPr>
+              <a:t>, 0, 170], </a:t>
+            </a:r>
+            <a:r>
+              <a:rPr lang="ko-KR" altLang="ko-KR" sz="1200"/>
+              <a:t>[0, 128, 255</a:t>
+            </a:r>
+            <a:r>
+              <a:rPr lang="en-US" altLang="ko-KR" sz="1200"/>
+              <a:t>0, 255]</a:t>
+            </a:r>
+          </a:p>
+          <a:p>
+            <a:pPr marL="285750" indent="-285750">
+              <a:buFontTx/>
+              <a:buChar char="-"/>
+            </a:pPr>
+            <a:r>
+              <a:rPr lang="en-US" altLang="ko-KR" sz="1200">
+                <a:highlight>
+                  <a:srgbClr val="FFFF00"/>
+                </a:highlight>
+              </a:rPr>
+              <a:t>Red-ish</a:t>
+            </a:r>
+            <a:br>
+              <a:rPr lang="en-US" altLang="ko-KR" sz="1200">
+                <a:highlight>
+                  <a:srgbClr val="FFFF00"/>
+                </a:highlight>
+              </a:rPr>
+            </a:br>
+            <a:r>
+              <a:rPr lang="ko-KR" altLang="ko-KR" sz="1200">
+                <a:highlight>
+                  <a:srgbClr val="FFFF00"/>
+                </a:highlight>
+              </a:rPr>
+              <a:t>[255, 128, 128</a:t>
+            </a:r>
+            <a:r>
+              <a:rPr lang="en-US" altLang="ko-KR" sz="1200">
+                <a:highlight>
+                  <a:srgbClr val="FFFF00"/>
+                </a:highlight>
+              </a:rPr>
+              <a:t>, 0, 85</a:t>
+            </a:r>
+            <a:r>
+              <a:rPr lang="ko-KR" altLang="ko-KR" sz="1200">
+                <a:highlight>
+                  <a:srgbClr val="FFFF00"/>
+                </a:highlight>
+              </a:rPr>
+              <a:t>]</a:t>
+            </a:r>
+            <a:r>
+              <a:rPr lang="en-US" altLang="ko-KR" sz="1200">
+                <a:highlight>
+                  <a:srgbClr val="FFFF00"/>
+                </a:highlight>
+              </a:rPr>
+              <a:t>, </a:t>
+            </a:r>
+            <a:r>
+              <a:rPr lang="ko-KR" altLang="ko-KR" sz="1200">
+                <a:highlight>
+                  <a:srgbClr val="FFFF00"/>
+                </a:highlight>
+              </a:rPr>
+              <a:t>[255, 128, 128</a:t>
+            </a:r>
+            <a:r>
+              <a:rPr lang="en-US" altLang="ko-KR" sz="1200">
+                <a:highlight>
+                  <a:srgbClr val="FFFF00"/>
+                </a:highlight>
+              </a:rPr>
+              <a:t>, 0, 170], </a:t>
+            </a:r>
+            <a:r>
+              <a:rPr lang="ko-KR" altLang="ko-KR" sz="1200">
+                <a:highlight>
+                  <a:srgbClr val="FFFF00"/>
+                </a:highlight>
+              </a:rPr>
+              <a:t>[255, 128, 128</a:t>
+            </a:r>
+            <a:r>
+              <a:rPr lang="en-US" altLang="ko-KR" sz="1200">
+                <a:highlight>
+                  <a:srgbClr val="FFFF00"/>
+                </a:highlight>
+              </a:rPr>
+              <a:t>, 0, 255]</a:t>
+            </a:r>
+          </a:p>
+          <a:p>
+            <a:pPr marL="285750" indent="-285750">
+              <a:buFontTx/>
+              <a:buChar char="-"/>
+            </a:pPr>
+            <a:r>
+              <a:rPr lang="en-US" altLang="ko-KR" sz="1200"/>
+              <a:t>Green-ish</a:t>
+            </a:r>
+            <a:br>
+              <a:rPr lang="en-US" altLang="ko-KR" sz="1200"/>
+            </a:br>
+            <a:r>
+              <a:rPr lang="ko-KR" altLang="ko-KR" sz="1200"/>
+              <a:t>[128, 255, 128</a:t>
+            </a:r>
+            <a:r>
+              <a:rPr lang="en-US" altLang="ko-KR" sz="1200"/>
+              <a:t>, 0, 85</a:t>
+            </a:r>
+            <a:r>
+              <a:rPr lang="ko-KR" altLang="ko-KR" sz="1200"/>
+              <a:t>]</a:t>
+            </a:r>
+            <a:r>
+              <a:rPr lang="en-US" altLang="ko-KR" sz="1200"/>
+              <a:t>, </a:t>
+            </a:r>
+            <a:r>
+              <a:rPr lang="ko-KR" altLang="ko-KR" sz="1200"/>
+              <a:t>[128, 255, 128</a:t>
+            </a:r>
+            <a:r>
+              <a:rPr lang="en-US" altLang="ko-KR" sz="1200"/>
+              <a:t>, 0, 170], </a:t>
+            </a:r>
+            <a:r>
+              <a:rPr lang="ko-KR" altLang="ko-KR" sz="1200"/>
+              <a:t>[128, 255, 128</a:t>
+            </a:r>
+            <a:r>
+              <a:rPr lang="en-US" altLang="ko-KR" sz="1200"/>
+              <a:t>, 0, 255]</a:t>
+            </a:r>
+          </a:p>
+          <a:p>
+            <a:pPr marL="285750" indent="-285750">
+              <a:buFontTx/>
+              <a:buChar char="-"/>
+            </a:pPr>
+            <a:r>
+              <a:rPr lang="en-US" altLang="ko-KR" sz="1200"/>
+              <a:t>Blue-ish </a:t>
+            </a:r>
+            <a:br>
+              <a:rPr lang="en-US" altLang="ko-KR" sz="1200"/>
+            </a:br>
+            <a:r>
+              <a:rPr lang="ko-KR" altLang="ko-KR" sz="1200"/>
+              <a:t>[128, 128, 255</a:t>
+            </a:r>
+            <a:r>
+              <a:rPr lang="en-US" altLang="ko-KR" sz="1200"/>
+              <a:t>, 0, 85</a:t>
+            </a:r>
+            <a:r>
+              <a:rPr lang="ko-KR" altLang="ko-KR" sz="1200"/>
+              <a:t>]</a:t>
+            </a:r>
+            <a:r>
+              <a:rPr lang="en-US" altLang="ko-KR" sz="1200"/>
+              <a:t>, </a:t>
+            </a:r>
+            <a:r>
+              <a:rPr lang="ko-KR" altLang="ko-KR" sz="1200">
+                <a:highlight>
+                  <a:srgbClr val="FFFF00"/>
+                </a:highlight>
+              </a:rPr>
+              <a:t>[128, 128, 255</a:t>
+            </a:r>
+            <a:r>
+              <a:rPr lang="en-US" altLang="ko-KR" sz="1200">
+                <a:highlight>
+                  <a:srgbClr val="FFFF00"/>
+                </a:highlight>
+              </a:rPr>
+              <a:t>, 0, 170], </a:t>
+            </a:r>
+            <a:r>
+              <a:rPr lang="ko-KR" altLang="ko-KR" sz="1200"/>
+              <a:t>[128, 128, 255</a:t>
+            </a:r>
+            <a:r>
+              <a:rPr lang="en-US" altLang="ko-KR" sz="1200"/>
+              <a:t>, 0, 255]</a:t>
+            </a:r>
+          </a:p>
+          <a:p>
+            <a:pPr marL="285750" indent="-285750">
+              <a:buFontTx/>
+              <a:buChar char="-"/>
+            </a:pPr>
+            <a:r>
+              <a:rPr lang="en-US" altLang="ko-KR" sz="1200"/>
+              <a:t>Mixed</a:t>
+            </a:r>
+            <a:br>
+              <a:rPr lang="en-US" altLang="ko-KR" sz="1200"/>
+            </a:br>
+            <a:r>
+              <a:rPr lang="ko-KR" altLang="ko-KR" sz="1200"/>
+              <a:t>[255, 128, 64</a:t>
+            </a:r>
+            <a:r>
+              <a:rPr lang="en-US" altLang="ko-KR" sz="1200"/>
+              <a:t>, 0, 85</a:t>
+            </a:r>
+            <a:r>
+              <a:rPr lang="ko-KR" altLang="ko-KR" sz="1200"/>
+              <a:t>]</a:t>
+            </a:r>
+            <a:r>
+              <a:rPr lang="en-US" altLang="ko-KR" sz="1200"/>
+              <a:t>, </a:t>
+            </a:r>
+            <a:r>
+              <a:rPr lang="ko-KR" altLang="ko-KR" sz="1200"/>
+              <a:t>[255, 128, 64</a:t>
+            </a:r>
+            <a:r>
+              <a:rPr lang="en-US" altLang="ko-KR" sz="1200"/>
+              <a:t>, 0, 170], [</a:t>
+            </a:r>
+            <a:r>
+              <a:rPr lang="ko-KR" altLang="ko-KR" sz="1200"/>
+              <a:t>[255, 128, 64</a:t>
+            </a:r>
+            <a:r>
+              <a:rPr lang="en-US" altLang="ko-KR" sz="1200"/>
+              <a:t>, 0, 255] </a:t>
+            </a:r>
+          </a:p>
+          <a:p>
+            <a:pPr marL="285750" indent="-285750">
+              <a:buFontTx/>
+              <a:buChar char="-"/>
+            </a:pPr>
+            <a:endParaRPr lang="en-US" altLang="ko-KR" sz="1200"/>
+          </a:p>
+          <a:p>
+            <a:pPr marL="285750" indent="-285750">
+              <a:buFontTx/>
+              <a:buChar char="-"/>
+            </a:pPr>
+            <a:endParaRPr lang="en-US" altLang="ko-KR" sz="1200"/>
+          </a:p>
+          <a:p>
+            <a:r>
+              <a:rPr lang="en-US" altLang="ko-KR" sz="1200"/>
+              <a:t>2) </a:t>
+            </a:r>
+            <a:r>
+              <a:rPr lang="ko-KR" altLang="en-US" sz="1200"/>
+              <a:t>각 </a:t>
+            </a:r>
+            <a:r>
+              <a:rPr lang="en-US" altLang="ko-KR" sz="1200"/>
+              <a:t>physical condition</a:t>
+            </a:r>
+            <a:r>
+              <a:rPr lang="ko-KR" altLang="en-US" sz="1200"/>
+              <a:t>에 대해 </a:t>
+            </a:r>
+            <a:r>
+              <a:rPr lang="en-US" altLang="ko-KR" sz="1200"/>
+              <a:t>target appearance </a:t>
+            </a:r>
+            <a:r>
+              <a:rPr lang="ko-KR" altLang="en-US" sz="1200"/>
+              <a:t>만들기</a:t>
+            </a:r>
+            <a:endParaRPr lang="en-US" altLang="ko-KR" sz="1200"/>
+          </a:p>
+          <a:p>
+            <a:r>
+              <a:rPr lang="en-US" altLang="ko-KR" sz="1200"/>
+              <a:t>ColorChecker </a:t>
+            </a:r>
+            <a:r>
+              <a:rPr lang="ko-KR" altLang="en-US" sz="1200"/>
+              <a:t>촬영 </a:t>
+            </a:r>
+            <a:endParaRPr lang="en-US" altLang="ko-KR" sz="1200"/>
+          </a:p>
+          <a:p>
+            <a:r>
+              <a:rPr lang="en-US" altLang="ko-KR" sz="1200"/>
+              <a:t>p1 = [255, 0, 0, 0, 255] </a:t>
+            </a:r>
+            <a:r>
+              <a:rPr lang="ko-KR" altLang="en-US" sz="1200"/>
+              <a:t>라면 </a:t>
+            </a:r>
+            <a:endParaRPr lang="en-US" altLang="ko-KR" sz="1200"/>
+          </a:p>
+          <a:p>
+            <a:r>
+              <a:rPr lang="en-US" altLang="ko-KR" sz="1200"/>
+              <a:t>24</a:t>
+            </a:r>
+            <a:r>
+              <a:rPr lang="ko-KR" altLang="en-US" sz="1200"/>
+              <a:t>개의 </a:t>
+            </a:r>
+            <a:r>
+              <a:rPr lang="en-US" altLang="ko-KR" sz="1200"/>
+              <a:t>patch</a:t>
+            </a:r>
+            <a:r>
+              <a:rPr lang="ko-KR" altLang="en-US" sz="1200"/>
+              <a:t>에 대한 측정값을</a:t>
+            </a:r>
+            <a:endParaRPr lang="en-US" altLang="ko-KR" sz="1200"/>
+          </a:p>
+          <a:p>
+            <a:r>
+              <a:rPr lang="en-US" altLang="ko-KR" sz="1200"/>
+              <a:t>C_p(p1)</a:t>
+            </a:r>
+            <a:r>
+              <a:rPr lang="ko-KR" altLang="en-US" sz="1200"/>
+              <a:t>으로 둔다</a:t>
+            </a:r>
+            <a:r>
+              <a:rPr lang="en-US" altLang="ko-KR" sz="1200"/>
+              <a:t>. </a:t>
+            </a:r>
+            <a:r>
+              <a:rPr lang="ko-KR" altLang="en-US" sz="1200"/>
+              <a:t>이것이 </a:t>
+            </a:r>
+            <a:r>
+              <a:rPr lang="en-US" altLang="ko-KR" sz="1200"/>
+              <a:t>target = C_(p1)</a:t>
+            </a:r>
+          </a:p>
+          <a:p>
+            <a:r>
+              <a:rPr lang="en-US" altLang="ko-KR" sz="1200"/>
+              <a:t>3) UE</a:t>
+            </a:r>
+            <a:r>
+              <a:rPr lang="ko-KR" altLang="en-US" sz="1200"/>
+              <a:t> </a:t>
+            </a:r>
+            <a:r>
+              <a:rPr lang="en-US" altLang="ko-KR" sz="1200"/>
+              <a:t>light</a:t>
+            </a:r>
+            <a:r>
+              <a:rPr lang="ko-KR" altLang="en-US" sz="1200"/>
+              <a:t> </a:t>
+            </a:r>
+            <a:r>
+              <a:rPr lang="en-US" altLang="ko-KR" sz="1200"/>
+              <a:t>parameter </a:t>
+            </a:r>
+            <a:r>
+              <a:rPr lang="ko-KR" altLang="en-US" sz="1200"/>
+              <a:t>최적화하기</a:t>
+            </a:r>
+            <a:endParaRPr lang="en-US" altLang="ko-KR" sz="1200"/>
+          </a:p>
+          <a:p>
+            <a:r>
+              <a:rPr lang="en-US" altLang="ko-KR" sz="1200"/>
+              <a:t>UE </a:t>
+            </a:r>
+            <a:r>
+              <a:rPr lang="ko-KR" altLang="en-US" sz="1200"/>
+              <a:t>입력에 대해서</a:t>
+            </a:r>
+            <a:endParaRPr lang="en-US" altLang="ko-KR" sz="1200"/>
+          </a:p>
+          <a:p>
+            <a:r>
+              <a:rPr lang="en-US" altLang="ko-KR" sz="1200"/>
+              <a:t>V</a:t>
+            </a:r>
+            <a:r>
+              <a:rPr lang="ko-KR" altLang="en-US" sz="1200"/>
+              <a:t> </a:t>
+            </a:r>
+            <a:r>
+              <a:rPr lang="en-US" altLang="ko-KR" sz="1200"/>
+              <a:t>=</a:t>
+            </a:r>
+            <a:r>
+              <a:rPr lang="ko-KR" altLang="en-US" sz="1200"/>
+              <a:t> </a:t>
+            </a:r>
+            <a:r>
+              <a:rPr lang="en-US" altLang="ko-KR" sz="1200"/>
+              <a:t>[R_v, G_v, B_v, I_v]</a:t>
+            </a:r>
+          </a:p>
+          <a:p>
+            <a:r>
+              <a:rPr lang="ko-KR" altLang="en-US" sz="1200"/>
+              <a:t>라고 하면</a:t>
+            </a:r>
+            <a:endParaRPr lang="en-US" altLang="ko-KR" sz="1200"/>
+          </a:p>
+          <a:p>
+            <a:r>
+              <a:rPr lang="en-US" altLang="ko-KR" sz="1200"/>
+              <a:t>V* = argmin_v</a:t>
+            </a:r>
+            <a:r>
+              <a:rPr lang="ko-KR" altLang="en-US" sz="1200"/>
+              <a:t> </a:t>
+            </a:r>
+            <a:r>
+              <a:rPr lang="en-US" altLang="ko-KR" sz="1200"/>
+              <a:t>L(C_v(v), C_p(p)) </a:t>
+            </a:r>
+            <a:r>
+              <a:rPr lang="ko-KR" altLang="en-US" sz="1200"/>
+              <a:t>인 </a:t>
+            </a:r>
+            <a:r>
+              <a:rPr lang="en-US" altLang="ko-KR" sz="1200"/>
+              <a:t>L</a:t>
+            </a:r>
+            <a:r>
+              <a:rPr lang="ko-KR" altLang="en-US" sz="1200"/>
+              <a:t>을 찾는다</a:t>
+            </a:r>
+            <a:r>
+              <a:rPr lang="en-US" altLang="ko-KR" sz="1200"/>
+              <a:t>.</a:t>
+            </a:r>
+          </a:p>
+          <a:p>
+            <a:r>
+              <a:rPr lang="ko-KR" altLang="en-US" sz="1200"/>
+              <a:t>단 모든 조합에 대해서 직접 찍는 것이 아니라</a:t>
+            </a:r>
+            <a:r>
+              <a:rPr lang="en-US" altLang="ko-KR" sz="1200"/>
+              <a:t>, virtual </a:t>
+            </a:r>
+            <a:r>
+              <a:rPr lang="ko-KR" altLang="en-US" sz="1200"/>
+              <a:t>조명 또한 조합을 고정해서 탐색을 돌린다</a:t>
+            </a:r>
+            <a:r>
+              <a:rPr lang="en-US" altLang="ko-KR" sz="1200"/>
+              <a:t>.</a:t>
+            </a:r>
+          </a:p>
+          <a:p>
+            <a:r>
+              <a:rPr lang="en-US" altLang="ko-KR" sz="1200"/>
+              <a:t>4) </a:t>
+            </a:r>
+            <a:r>
+              <a:rPr lang="ko-KR" altLang="en-US" sz="1200"/>
+              <a:t>대응점을 모두 얻으면 </a:t>
+            </a:r>
+            <a:r>
+              <a:rPr lang="en-US" altLang="ko-KR" sz="1200"/>
+              <a:t>f(p) = v* </a:t>
+            </a:r>
+            <a:r>
+              <a:rPr lang="ko-KR" altLang="en-US" sz="1200"/>
+              <a:t>로 </a:t>
+            </a:r>
+            <a:r>
+              <a:rPr lang="en-US" altLang="ko-KR" sz="1200"/>
+              <a:t>fitting</a:t>
+            </a:r>
+            <a:r>
+              <a:rPr lang="ko-KR" altLang="en-US" sz="1200"/>
+              <a:t>한다</a:t>
+            </a:r>
+            <a:r>
+              <a:rPr lang="en-US" altLang="ko-KR" sz="1200"/>
+              <a:t>.</a:t>
+            </a:r>
+            <a:r>
+              <a:rPr lang="ko-KR" altLang="en-US" sz="1200"/>
+              <a:t> </a:t>
+            </a:r>
+            <a:endParaRPr lang="en-US" altLang="ko-KR" sz="1200"/>
+          </a:p>
+          <a:p>
+            <a:r>
+              <a:rPr lang="en-US" altLang="ko-KR" sz="1200"/>
+              <a:t>5) Calibration function</a:t>
+            </a:r>
+            <a:r>
+              <a:rPr lang="ko-KR" altLang="en-US" sz="1200"/>
+              <a:t>은 단순하게 </a:t>
+            </a:r>
+            <a:r>
+              <a:rPr lang="en-US" altLang="ko-KR" sz="1200"/>
+              <a:t>linear regression</a:t>
+            </a:r>
+            <a:r>
+              <a:rPr lang="ko-KR" altLang="en-US" sz="1200"/>
+              <a:t>을 한다</a:t>
+            </a:r>
+            <a:r>
+              <a:rPr lang="en-US" altLang="ko-KR" sz="1200"/>
+              <a:t>.</a:t>
+            </a:r>
+          </a:p>
+          <a:p>
+            <a:endParaRPr lang="ko-KR" altLang="en-US" sz="1200"/>
+          </a:p>
+        </p:txBody>
+      </p:sp>
+    </p:spTree>
+    <p:extLst>
+      <p:ext uri="{BB962C8B-B14F-4D97-AF65-F5344CB8AC3E}">
+        <p14:creationId xmlns:p14="http://schemas.microsoft.com/office/powerpoint/2010/main" val="984375228"/>
+      </p:ext>
+    </p:extLst>
+  </p:cSld>
+  <p:clrMapOvr>
+    <a:masterClrMapping/>
+  </p:clrMapOvr>
+</p:sld>
+</file>
+
 <file path=ppt/theme/theme1.xml><?xml version="1.0" encoding="utf-8"?>
 <a:theme xmlns:a="http://schemas.openxmlformats.org/drawingml/2006/main" name="Office 테마">
   <a:themeElements>

--- a/colorchecker_light_calibraiton.pptx
+++ b/colorchecker_light_calibraiton.pptx
@@ -6,14 +6,9 @@
   </p:sldMasterIdLst>
   <p:sldIdLst>
     <p:sldId id="256" r:id="rId2"/>
-    <p:sldId id="257" r:id="rId3"/>
-    <p:sldId id="258" r:id="rId4"/>
-    <p:sldId id="259" r:id="rId5"/>
-    <p:sldId id="260" r:id="rId6"/>
-    <p:sldId id="261" r:id="rId7"/>
-    <p:sldId id="262" r:id="rId8"/>
-    <p:sldId id="263" r:id="rId9"/>
-    <p:sldId id="264" r:id="rId10"/>
+    <p:sldId id="263" r:id="rId3"/>
+    <p:sldId id="262" r:id="rId4"/>
+    <p:sldId id="264" r:id="rId5"/>
   </p:sldIdLst>
   <p:sldSz cx="12192000" cy="6858000"/>
   <p:notesSz cx="6858000" cy="9144000"/>
@@ -267,7 +262,7 @@
           <a:p>
             <a:fld id="{CDD09523-012A-4FD0-904B-354D5A41C033}" type="datetimeFigureOut">
               <a:rPr lang="ko-KR" altLang="en-US" smtClean="0"/>
-              <a:t>2026-09-02</a:t>
+              <a:t>2026-09-07</a:t>
             </a:fld>
             <a:endParaRPr lang="ko-KR" altLang="en-US"/>
           </a:p>
@@ -465,7 +460,7 @@
           <a:p>
             <a:fld id="{CDD09523-012A-4FD0-904B-354D5A41C033}" type="datetimeFigureOut">
               <a:rPr lang="ko-KR" altLang="en-US" smtClean="0"/>
-              <a:t>2026-09-02</a:t>
+              <a:t>2026-09-07</a:t>
             </a:fld>
             <a:endParaRPr lang="ko-KR" altLang="en-US"/>
           </a:p>
@@ -673,7 +668,7 @@
           <a:p>
             <a:fld id="{CDD09523-012A-4FD0-904B-354D5A41C033}" type="datetimeFigureOut">
               <a:rPr lang="ko-KR" altLang="en-US" smtClean="0"/>
-              <a:t>2026-09-02</a:t>
+              <a:t>2026-09-07</a:t>
             </a:fld>
             <a:endParaRPr lang="ko-KR" altLang="en-US"/>
           </a:p>
@@ -871,7 +866,7 @@
           <a:p>
             <a:fld id="{CDD09523-012A-4FD0-904B-354D5A41C033}" type="datetimeFigureOut">
               <a:rPr lang="ko-KR" altLang="en-US" smtClean="0"/>
-              <a:t>2026-09-02</a:t>
+              <a:t>2026-09-07</a:t>
             </a:fld>
             <a:endParaRPr lang="ko-KR" altLang="en-US"/>
           </a:p>
@@ -1146,7 +1141,7 @@
           <a:p>
             <a:fld id="{CDD09523-012A-4FD0-904B-354D5A41C033}" type="datetimeFigureOut">
               <a:rPr lang="ko-KR" altLang="en-US" smtClean="0"/>
-              <a:t>2026-09-02</a:t>
+              <a:t>2026-09-07</a:t>
             </a:fld>
             <a:endParaRPr lang="ko-KR" altLang="en-US"/>
           </a:p>
@@ -1411,7 +1406,7 @@
           <a:p>
             <a:fld id="{CDD09523-012A-4FD0-904B-354D5A41C033}" type="datetimeFigureOut">
               <a:rPr lang="ko-KR" altLang="en-US" smtClean="0"/>
-              <a:t>2026-09-02</a:t>
+              <a:t>2026-09-07</a:t>
             </a:fld>
             <a:endParaRPr lang="ko-KR" altLang="en-US"/>
           </a:p>
@@ -1823,7 +1818,7 @@
           <a:p>
             <a:fld id="{CDD09523-012A-4FD0-904B-354D5A41C033}" type="datetimeFigureOut">
               <a:rPr lang="ko-KR" altLang="en-US" smtClean="0"/>
-              <a:t>2026-09-02</a:t>
+              <a:t>2026-09-07</a:t>
             </a:fld>
             <a:endParaRPr lang="ko-KR" altLang="en-US"/>
           </a:p>
@@ -1964,7 +1959,7 @@
           <a:p>
             <a:fld id="{CDD09523-012A-4FD0-904B-354D5A41C033}" type="datetimeFigureOut">
               <a:rPr lang="ko-KR" altLang="en-US" smtClean="0"/>
-              <a:t>2026-09-02</a:t>
+              <a:t>2026-09-07</a:t>
             </a:fld>
             <a:endParaRPr lang="ko-KR" altLang="en-US"/>
           </a:p>
@@ -2077,7 +2072,7 @@
           <a:p>
             <a:fld id="{CDD09523-012A-4FD0-904B-354D5A41C033}" type="datetimeFigureOut">
               <a:rPr lang="ko-KR" altLang="en-US" smtClean="0"/>
-              <a:t>2026-09-02</a:t>
+              <a:t>2026-09-07</a:t>
             </a:fld>
             <a:endParaRPr lang="ko-KR" altLang="en-US"/>
           </a:p>
@@ -2388,7 +2383,7 @@
           <a:p>
             <a:fld id="{CDD09523-012A-4FD0-904B-354D5A41C033}" type="datetimeFigureOut">
               <a:rPr lang="ko-KR" altLang="en-US" smtClean="0"/>
-              <a:t>2026-09-02</a:t>
+              <a:t>2026-09-07</a:t>
             </a:fld>
             <a:endParaRPr lang="ko-KR" altLang="en-US"/>
           </a:p>
@@ -2676,7 +2671,7 @@
           <a:p>
             <a:fld id="{CDD09523-012A-4FD0-904B-354D5A41C033}" type="datetimeFigureOut">
               <a:rPr lang="ko-KR" altLang="en-US" smtClean="0"/>
-              <a:t>2026-09-02</a:t>
+              <a:t>2026-09-07</a:t>
             </a:fld>
             <a:endParaRPr lang="ko-KR" altLang="en-US"/>
           </a:p>
@@ -2917,7 +2912,7 @@
           <a:p>
             <a:fld id="{CDD09523-012A-4FD0-904B-354D5A41C033}" type="datetimeFigureOut">
               <a:rPr lang="ko-KR" altLang="en-US" smtClean="0"/>
-              <a:t>2026-09-02</a:t>
+              <a:t>2026-09-07</a:t>
             </a:fld>
             <a:endParaRPr lang="ko-KR" altLang="en-US"/>
           </a:p>
@@ -3505,7 +3500,7 @@
         <p:cNvPr id="1" name="">
           <a:extLst>
             <a:ext uri="{FF2B5EF4-FFF2-40B4-BE49-F238E27FC236}">
-              <a16:creationId xmlns:a16="http://schemas.microsoft.com/office/drawing/2014/main" id="{B8AF36E9-C98E-1877-551F-566E2A6766AB}"/>
+              <a16:creationId xmlns:a16="http://schemas.microsoft.com/office/drawing/2014/main" id="{0A7FC834-58D4-C86F-FDFD-E0394045A27E}"/>
             </a:ext>
           </a:extLst>
         </p:cNvPr>
@@ -3522,10 +3517,10 @@
       </p:grpSpPr>
       <p:pic>
         <p:nvPicPr>
-          <p:cNvPr id="5" name="그림 4">
-            <a:extLst>
-              <a:ext uri="{FF2B5EF4-FFF2-40B4-BE49-F238E27FC236}">
-                <a16:creationId xmlns:a16="http://schemas.microsoft.com/office/drawing/2014/main" id="{95B665C3-20D8-DD93-A8DF-2CBE8EA83F75}"/>
+          <p:cNvPr id="4" name="그림 3">
+            <a:extLst>
+              <a:ext uri="{FF2B5EF4-FFF2-40B4-BE49-F238E27FC236}">
+                <a16:creationId xmlns:a16="http://schemas.microsoft.com/office/drawing/2014/main" id="{F542D8F1-5474-6BCA-EBA3-EF182BEABA3C}"/>
               </a:ext>
             </a:extLst>
           </p:cNvPr>
@@ -3535,15 +3530,21 @@
           <p:nvPr/>
         </p:nvPicPr>
         <p:blipFill>
-          <a:blip r:embed="rId2"/>
+          <a:blip r:embed="rId2">
+            <a:extLst>
+              <a:ext uri="{28A0092B-C50C-407E-A947-70E740481C1C}">
+                <a14:useLocalDpi xmlns:a14="http://schemas.microsoft.com/office/drawing/2010/main" val="0"/>
+              </a:ext>
+            </a:extLst>
+          </a:blip>
           <a:stretch>
             <a:fillRect/>
           </a:stretch>
         </p:blipFill>
         <p:spPr>
           <a:xfrm>
-            <a:off x="0" y="0"/>
-            <a:ext cx="5715798" cy="3934374"/>
+            <a:off x="648222" y="364625"/>
+            <a:ext cx="10895556" cy="6128750"/>
           </a:xfrm>
           <a:prstGeom prst="rect">
             <a:avLst/>
@@ -3552,128 +3553,44 @@
       </p:pic>
       <p:sp>
         <p:nvSpPr>
-          <p:cNvPr id="6" name="직사각형 5">
-            <a:extLst>
-              <a:ext uri="{FF2B5EF4-FFF2-40B4-BE49-F238E27FC236}">
-                <a16:creationId xmlns:a16="http://schemas.microsoft.com/office/drawing/2014/main" id="{FD8FD5C3-576F-A648-2F1E-259F965467C3}"/>
-              </a:ext>
-            </a:extLst>
-          </p:cNvPr>
-          <p:cNvSpPr/>
+          <p:cNvPr id="7" name="TextBox 6">
+            <a:extLst>
+              <a:ext uri="{FF2B5EF4-FFF2-40B4-BE49-F238E27FC236}">
+                <a16:creationId xmlns:a16="http://schemas.microsoft.com/office/drawing/2014/main" id="{595AF5D8-541C-DD72-4D1D-AD5070FAE588}"/>
+              </a:ext>
+            </a:extLst>
+          </p:cNvPr>
+          <p:cNvSpPr txBox="1"/>
           <p:nvPr/>
         </p:nvSpPr>
         <p:spPr>
           <a:xfrm>
-            <a:off x="2573976" y="2530258"/>
-            <a:ext cx="394570" cy="400832"/>
+            <a:off x="839244" y="6493375"/>
+            <a:ext cx="6983260" cy="369332"/>
           </a:xfrm>
           <a:prstGeom prst="rect">
             <a:avLst/>
           </a:prstGeom>
           <a:noFill/>
-          <a:ln>
-            <a:solidFill>
-              <a:schemeClr val="bg1"/>
-            </a:solidFill>
-          </a:ln>
         </p:spPr>
-        <p:style>
-          <a:lnRef idx="2">
-            <a:schemeClr val="accent1">
-              <a:shade val="15000"/>
-            </a:schemeClr>
-          </a:lnRef>
-          <a:fillRef idx="1">
-            <a:schemeClr val="accent1"/>
-          </a:fillRef>
-          <a:effectRef idx="0">
-            <a:schemeClr val="accent1"/>
-          </a:effectRef>
-          <a:fontRef idx="minor">
-            <a:schemeClr val="lt1"/>
-          </a:fontRef>
-        </p:style>
-        <p:txBody>
-          <a:bodyPr rtlCol="0" anchor="ctr"/>
-          <a:lstStyle/>
-          <a:p>
-            <a:pPr algn="ctr"/>
+        <p:txBody>
+          <a:bodyPr wrap="square" rtlCol="0">
+            <a:spAutoFit/>
+          </a:bodyPr>
+          <a:lstStyle/>
+          <a:p>
+            <a:r>
+              <a:rPr lang="en-US" altLang="ko-KR"/>
+              <a:t>R: 255, G:0, B:0, Intensity: 255 </a:t>
+            </a:r>
             <a:endParaRPr lang="ko-KR" altLang="en-US"/>
           </a:p>
         </p:txBody>
       </p:sp>
-      <p:cxnSp>
-        <p:nvCxnSpPr>
-          <p:cNvPr id="14" name="직선 연결선 13">
-            <a:extLst>
-              <a:ext uri="{FF2B5EF4-FFF2-40B4-BE49-F238E27FC236}">
-                <a16:creationId xmlns:a16="http://schemas.microsoft.com/office/drawing/2014/main" id="{707C1572-4D8D-7B73-9CD4-02B6B6AF5779}"/>
-              </a:ext>
-            </a:extLst>
-          </p:cNvPr>
-          <p:cNvCxnSpPr>
-            <a:cxnSpLocks/>
-          </p:cNvCxnSpPr>
-          <p:nvPr/>
-        </p:nvCxnSpPr>
-        <p:spPr>
-          <a:xfrm flipH="1">
-            <a:off x="2771261" y="707721"/>
-            <a:ext cx="5408235" cy="2022953"/>
-          </a:xfrm>
-          <a:prstGeom prst="line">
-            <a:avLst/>
-          </a:prstGeom>
-        </p:spPr>
-        <p:style>
-          <a:lnRef idx="2">
-            <a:schemeClr val="accent1"/>
-          </a:lnRef>
-          <a:fillRef idx="0">
-            <a:schemeClr val="accent1"/>
-          </a:fillRef>
-          <a:effectRef idx="1">
-            <a:schemeClr val="accent1"/>
-          </a:effectRef>
-          <a:fontRef idx="minor">
-            <a:schemeClr val="tx1"/>
-          </a:fontRef>
-        </p:style>
-      </p:cxnSp>
-      <p:pic>
-        <p:nvPicPr>
-          <p:cNvPr id="3" name="그림 2">
-            <a:extLst>
-              <a:ext uri="{FF2B5EF4-FFF2-40B4-BE49-F238E27FC236}">
-                <a16:creationId xmlns:a16="http://schemas.microsoft.com/office/drawing/2014/main" id="{5013426D-3190-81BF-5ABA-B418E627B7B6}"/>
-              </a:ext>
-            </a:extLst>
-          </p:cNvPr>
-          <p:cNvPicPr>
-            <a:picLocks noChangeAspect="1"/>
-          </p:cNvPicPr>
-          <p:nvPr/>
-        </p:nvPicPr>
-        <p:blipFill>
-          <a:blip r:embed="rId3"/>
-          <a:stretch>
-            <a:fillRect/>
-          </a:stretch>
-        </p:blipFill>
-        <p:spPr>
-          <a:xfrm>
-            <a:off x="6302996" y="370469"/>
-            <a:ext cx="5790884" cy="2360205"/>
-          </a:xfrm>
-          <a:prstGeom prst="rect">
-            <a:avLst/>
-          </a:prstGeom>
-        </p:spPr>
-      </p:pic>
     </p:spTree>
     <p:extLst>
       <p:ext uri="{BB962C8B-B14F-4D97-AF65-F5344CB8AC3E}">
-        <p14:creationId xmlns:p14="http://schemas.microsoft.com/office/powerpoint/2010/main" val="1701353067"/>
+        <p14:creationId xmlns:p14="http://schemas.microsoft.com/office/powerpoint/2010/main" val="1064654339"/>
       </p:ext>
     </p:extLst>
   </p:cSld>
@@ -3684,750 +3601,6 @@
 </file>
 
 <file path=ppt/slides/slide3.xml><?xml version="1.0" encoding="utf-8"?>
-<p:sld xmlns:a="http://schemas.openxmlformats.org/drawingml/2006/main" xmlns:r="http://schemas.openxmlformats.org/officeDocument/2006/relationships" xmlns:p="http://schemas.openxmlformats.org/presentationml/2006/main">
-  <p:cSld>
-    <p:spTree>
-      <p:nvGrpSpPr>
-        <p:cNvPr id="1" name="">
-          <a:extLst>
-            <a:ext uri="{FF2B5EF4-FFF2-40B4-BE49-F238E27FC236}">
-              <a16:creationId xmlns:a16="http://schemas.microsoft.com/office/drawing/2014/main" id="{1E0CA43E-12FF-70A0-48C0-9D9F40BFF588}"/>
-            </a:ext>
-          </a:extLst>
-        </p:cNvPr>
-        <p:cNvGrpSpPr/>
-        <p:nvPr/>
-      </p:nvGrpSpPr>
-      <p:grpSpPr>
-        <a:xfrm>
-          <a:off x="0" y="0"/>
-          <a:ext cx="0" cy="0"/>
-          <a:chOff x="0" y="0"/>
-          <a:chExt cx="0" cy="0"/>
-        </a:xfrm>
-      </p:grpSpPr>
-      <p:pic>
-        <p:nvPicPr>
-          <p:cNvPr id="5" name="그림 4">
-            <a:extLst>
-              <a:ext uri="{FF2B5EF4-FFF2-40B4-BE49-F238E27FC236}">
-                <a16:creationId xmlns:a16="http://schemas.microsoft.com/office/drawing/2014/main" id="{A9BE2682-AA3C-D6C7-84D8-09143BBC5CB8}"/>
-              </a:ext>
-            </a:extLst>
-          </p:cNvPr>
-          <p:cNvPicPr>
-            <a:picLocks noChangeAspect="1"/>
-          </p:cNvPicPr>
-          <p:nvPr/>
-        </p:nvPicPr>
-        <p:blipFill>
-          <a:blip r:embed="rId2"/>
-          <a:stretch>
-            <a:fillRect/>
-          </a:stretch>
-        </p:blipFill>
-        <p:spPr>
-          <a:xfrm>
-            <a:off x="0" y="0"/>
-            <a:ext cx="5715798" cy="3934374"/>
-          </a:xfrm>
-          <a:prstGeom prst="rect">
-            <a:avLst/>
-          </a:prstGeom>
-        </p:spPr>
-      </p:pic>
-      <p:sp>
-        <p:nvSpPr>
-          <p:cNvPr id="6" name="직사각형 5">
-            <a:extLst>
-              <a:ext uri="{FF2B5EF4-FFF2-40B4-BE49-F238E27FC236}">
-                <a16:creationId xmlns:a16="http://schemas.microsoft.com/office/drawing/2014/main" id="{5C4D0F1F-B75C-10FB-5957-5EAEA6F7072F}"/>
-              </a:ext>
-            </a:extLst>
-          </p:cNvPr>
-          <p:cNvSpPr/>
-          <p:nvPr/>
-        </p:nvSpPr>
-        <p:spPr>
-          <a:xfrm>
-            <a:off x="3056229" y="2530258"/>
-            <a:ext cx="394570" cy="400832"/>
-          </a:xfrm>
-          <a:prstGeom prst="rect">
-            <a:avLst/>
-          </a:prstGeom>
-          <a:noFill/>
-          <a:ln>
-            <a:solidFill>
-              <a:schemeClr val="bg1"/>
-            </a:solidFill>
-          </a:ln>
-        </p:spPr>
-        <p:style>
-          <a:lnRef idx="2">
-            <a:schemeClr val="accent1">
-              <a:shade val="15000"/>
-            </a:schemeClr>
-          </a:lnRef>
-          <a:fillRef idx="1">
-            <a:schemeClr val="accent1"/>
-          </a:fillRef>
-          <a:effectRef idx="0">
-            <a:schemeClr val="accent1"/>
-          </a:effectRef>
-          <a:fontRef idx="minor">
-            <a:schemeClr val="lt1"/>
-          </a:fontRef>
-        </p:style>
-        <p:txBody>
-          <a:bodyPr rtlCol="0" anchor="ctr"/>
-          <a:lstStyle/>
-          <a:p>
-            <a:pPr algn="ctr"/>
-            <a:endParaRPr lang="ko-KR" altLang="en-US"/>
-          </a:p>
-        </p:txBody>
-      </p:sp>
-      <p:cxnSp>
-        <p:nvCxnSpPr>
-          <p:cNvPr id="14" name="직선 연결선 13">
-            <a:extLst>
-              <a:ext uri="{FF2B5EF4-FFF2-40B4-BE49-F238E27FC236}">
-                <a16:creationId xmlns:a16="http://schemas.microsoft.com/office/drawing/2014/main" id="{17E9ABBF-99F5-0123-9F1B-DCDB4AB654F0}"/>
-              </a:ext>
-            </a:extLst>
-          </p:cNvPr>
-          <p:cNvCxnSpPr>
-            <a:cxnSpLocks/>
-          </p:cNvCxnSpPr>
-          <p:nvPr/>
-        </p:nvCxnSpPr>
-        <p:spPr>
-          <a:xfrm flipH="1">
-            <a:off x="3253514" y="707721"/>
-            <a:ext cx="5408235" cy="2022953"/>
-          </a:xfrm>
-          <a:prstGeom prst="line">
-            <a:avLst/>
-          </a:prstGeom>
-        </p:spPr>
-        <p:style>
-          <a:lnRef idx="2">
-            <a:schemeClr val="accent1"/>
-          </a:lnRef>
-          <a:fillRef idx="0">
-            <a:schemeClr val="accent1"/>
-          </a:fillRef>
-          <a:effectRef idx="1">
-            <a:schemeClr val="accent1"/>
-          </a:effectRef>
-          <a:fontRef idx="minor">
-            <a:schemeClr val="tx1"/>
-          </a:fontRef>
-        </p:style>
-      </p:cxnSp>
-      <p:pic>
-        <p:nvPicPr>
-          <p:cNvPr id="4" name="그림 3">
-            <a:extLst>
-              <a:ext uri="{FF2B5EF4-FFF2-40B4-BE49-F238E27FC236}">
-                <a16:creationId xmlns:a16="http://schemas.microsoft.com/office/drawing/2014/main" id="{DC3D8FEA-4DBE-2D48-3ADC-EE211A8131E7}"/>
-              </a:ext>
-            </a:extLst>
-          </p:cNvPr>
-          <p:cNvPicPr>
-            <a:picLocks noChangeAspect="1"/>
-          </p:cNvPicPr>
-          <p:nvPr/>
-        </p:nvPicPr>
-        <p:blipFill>
-          <a:blip r:embed="rId3"/>
-          <a:stretch>
-            <a:fillRect/>
-          </a:stretch>
-        </p:blipFill>
-        <p:spPr>
-          <a:xfrm>
-            <a:off x="6199465" y="148549"/>
-            <a:ext cx="5715798" cy="2237964"/>
-          </a:xfrm>
-          <a:prstGeom prst="rect">
-            <a:avLst/>
-          </a:prstGeom>
-        </p:spPr>
-      </p:pic>
-    </p:spTree>
-    <p:extLst>
-      <p:ext uri="{BB962C8B-B14F-4D97-AF65-F5344CB8AC3E}">
-        <p14:creationId xmlns:p14="http://schemas.microsoft.com/office/powerpoint/2010/main" val="1742813964"/>
-      </p:ext>
-    </p:extLst>
-  </p:cSld>
-  <p:clrMapOvr>
-    <a:masterClrMapping/>
-  </p:clrMapOvr>
-</p:sld>
-</file>
-
-<file path=ppt/slides/slide4.xml><?xml version="1.0" encoding="utf-8"?>
-<p:sld xmlns:a="http://schemas.openxmlformats.org/drawingml/2006/main" xmlns:r="http://schemas.openxmlformats.org/officeDocument/2006/relationships" xmlns:p="http://schemas.openxmlformats.org/presentationml/2006/main">
-  <p:cSld>
-    <p:spTree>
-      <p:nvGrpSpPr>
-        <p:cNvPr id="1" name="">
-          <a:extLst>
-            <a:ext uri="{FF2B5EF4-FFF2-40B4-BE49-F238E27FC236}">
-              <a16:creationId xmlns:a16="http://schemas.microsoft.com/office/drawing/2014/main" id="{95EC0B14-ABC1-D55F-F98F-02FA745325BF}"/>
-            </a:ext>
-          </a:extLst>
-        </p:cNvPr>
-        <p:cNvGrpSpPr/>
-        <p:nvPr/>
-      </p:nvGrpSpPr>
-      <p:grpSpPr>
-        <a:xfrm>
-          <a:off x="0" y="0"/>
-          <a:ext cx="0" cy="0"/>
-          <a:chOff x="0" y="0"/>
-          <a:chExt cx="0" cy="0"/>
-        </a:xfrm>
-      </p:grpSpPr>
-      <p:pic>
-        <p:nvPicPr>
-          <p:cNvPr id="5" name="그림 4">
-            <a:extLst>
-              <a:ext uri="{FF2B5EF4-FFF2-40B4-BE49-F238E27FC236}">
-                <a16:creationId xmlns:a16="http://schemas.microsoft.com/office/drawing/2014/main" id="{88C911B6-5AB4-AC45-8362-9E3A27F5568F}"/>
-              </a:ext>
-            </a:extLst>
-          </p:cNvPr>
-          <p:cNvPicPr>
-            <a:picLocks noChangeAspect="1"/>
-          </p:cNvPicPr>
-          <p:nvPr/>
-        </p:nvPicPr>
-        <p:blipFill>
-          <a:blip r:embed="rId2"/>
-          <a:stretch>
-            <a:fillRect/>
-          </a:stretch>
-        </p:blipFill>
-        <p:spPr>
-          <a:xfrm>
-            <a:off x="0" y="0"/>
-            <a:ext cx="5715798" cy="3934374"/>
-          </a:xfrm>
-          <a:prstGeom prst="rect">
-            <a:avLst/>
-          </a:prstGeom>
-        </p:spPr>
-      </p:pic>
-      <p:sp>
-        <p:nvSpPr>
-          <p:cNvPr id="6" name="직사각형 5">
-            <a:extLst>
-              <a:ext uri="{FF2B5EF4-FFF2-40B4-BE49-F238E27FC236}">
-                <a16:creationId xmlns:a16="http://schemas.microsoft.com/office/drawing/2014/main" id="{089178EC-E83F-898D-5016-6D76DC09C6CE}"/>
-              </a:ext>
-            </a:extLst>
-          </p:cNvPr>
-          <p:cNvSpPr/>
-          <p:nvPr/>
-        </p:nvSpPr>
-        <p:spPr>
-          <a:xfrm>
-            <a:off x="3983155" y="2530258"/>
-            <a:ext cx="394570" cy="400832"/>
-          </a:xfrm>
-          <a:prstGeom prst="rect">
-            <a:avLst/>
-          </a:prstGeom>
-          <a:noFill/>
-          <a:ln>
-            <a:solidFill>
-              <a:schemeClr val="bg1"/>
-            </a:solidFill>
-          </a:ln>
-        </p:spPr>
-        <p:style>
-          <a:lnRef idx="2">
-            <a:schemeClr val="accent1">
-              <a:shade val="15000"/>
-            </a:schemeClr>
-          </a:lnRef>
-          <a:fillRef idx="1">
-            <a:schemeClr val="accent1"/>
-          </a:fillRef>
-          <a:effectRef idx="0">
-            <a:schemeClr val="accent1"/>
-          </a:effectRef>
-          <a:fontRef idx="minor">
-            <a:schemeClr val="lt1"/>
-          </a:fontRef>
-        </p:style>
-        <p:txBody>
-          <a:bodyPr rtlCol="0" anchor="ctr"/>
-          <a:lstStyle/>
-          <a:p>
-            <a:pPr algn="ctr"/>
-            <a:endParaRPr lang="ko-KR" altLang="en-US"/>
-          </a:p>
-        </p:txBody>
-      </p:sp>
-      <p:cxnSp>
-        <p:nvCxnSpPr>
-          <p:cNvPr id="14" name="직선 연결선 13">
-            <a:extLst>
-              <a:ext uri="{FF2B5EF4-FFF2-40B4-BE49-F238E27FC236}">
-                <a16:creationId xmlns:a16="http://schemas.microsoft.com/office/drawing/2014/main" id="{D7E6845F-44E3-5340-E3A7-00A5C992D36C}"/>
-              </a:ext>
-            </a:extLst>
-          </p:cNvPr>
-          <p:cNvCxnSpPr>
-            <a:cxnSpLocks/>
-          </p:cNvCxnSpPr>
-          <p:nvPr/>
-        </p:nvCxnSpPr>
-        <p:spPr>
-          <a:xfrm flipH="1">
-            <a:off x="4180440" y="707721"/>
-            <a:ext cx="5408235" cy="2022953"/>
-          </a:xfrm>
-          <a:prstGeom prst="line">
-            <a:avLst/>
-          </a:prstGeom>
-        </p:spPr>
-        <p:style>
-          <a:lnRef idx="2">
-            <a:schemeClr val="accent1"/>
-          </a:lnRef>
-          <a:fillRef idx="0">
-            <a:schemeClr val="accent1"/>
-          </a:fillRef>
-          <a:effectRef idx="1">
-            <a:schemeClr val="accent1"/>
-          </a:effectRef>
-          <a:fontRef idx="minor">
-            <a:schemeClr val="tx1"/>
-          </a:fontRef>
-        </p:style>
-      </p:cxnSp>
-      <p:pic>
-        <p:nvPicPr>
-          <p:cNvPr id="3" name="그림 2">
-            <a:extLst>
-              <a:ext uri="{FF2B5EF4-FFF2-40B4-BE49-F238E27FC236}">
-                <a16:creationId xmlns:a16="http://schemas.microsoft.com/office/drawing/2014/main" id="{7F8F311D-48E7-3E9E-EC01-0C11F4BFDC02}"/>
-              </a:ext>
-            </a:extLst>
-          </p:cNvPr>
-          <p:cNvPicPr>
-            <a:picLocks noChangeAspect="1"/>
-          </p:cNvPicPr>
-          <p:nvPr/>
-        </p:nvPicPr>
-        <p:blipFill>
-          <a:blip r:embed="rId3"/>
-          <a:stretch>
-            <a:fillRect/>
-          </a:stretch>
-        </p:blipFill>
-        <p:spPr>
-          <a:xfrm>
-            <a:off x="6413440" y="247711"/>
-            <a:ext cx="5715799" cy="2282547"/>
-          </a:xfrm>
-          <a:prstGeom prst="rect">
-            <a:avLst/>
-          </a:prstGeom>
-        </p:spPr>
-      </p:pic>
-    </p:spTree>
-    <p:extLst>
-      <p:ext uri="{BB962C8B-B14F-4D97-AF65-F5344CB8AC3E}">
-        <p14:creationId xmlns:p14="http://schemas.microsoft.com/office/powerpoint/2010/main" val="142170188"/>
-      </p:ext>
-    </p:extLst>
-  </p:cSld>
-  <p:clrMapOvr>
-    <a:masterClrMapping/>
-  </p:clrMapOvr>
-</p:sld>
-</file>
-
-<file path=ppt/slides/slide5.xml><?xml version="1.0" encoding="utf-8"?>
-<p:sld xmlns:a="http://schemas.openxmlformats.org/drawingml/2006/main" xmlns:r="http://schemas.openxmlformats.org/officeDocument/2006/relationships" xmlns:p="http://schemas.openxmlformats.org/presentationml/2006/main">
-  <p:cSld>
-    <p:spTree>
-      <p:nvGrpSpPr>
-        <p:cNvPr id="1" name="">
-          <a:extLst>
-            <a:ext uri="{FF2B5EF4-FFF2-40B4-BE49-F238E27FC236}">
-              <a16:creationId xmlns:a16="http://schemas.microsoft.com/office/drawing/2014/main" id="{FB97E707-2048-B511-2482-2F7846869FB9}"/>
-            </a:ext>
-          </a:extLst>
-        </p:cNvPr>
-        <p:cNvGrpSpPr/>
-        <p:nvPr/>
-      </p:nvGrpSpPr>
-      <p:grpSpPr>
-        <a:xfrm>
-          <a:off x="0" y="0"/>
-          <a:ext cx="0" cy="0"/>
-          <a:chOff x="0" y="0"/>
-          <a:chExt cx="0" cy="0"/>
-        </a:xfrm>
-      </p:grpSpPr>
-      <p:pic>
-        <p:nvPicPr>
-          <p:cNvPr id="5" name="그림 4">
-            <a:extLst>
-              <a:ext uri="{FF2B5EF4-FFF2-40B4-BE49-F238E27FC236}">
-                <a16:creationId xmlns:a16="http://schemas.microsoft.com/office/drawing/2014/main" id="{D1429414-84CA-9FEB-998D-570125BC3820}"/>
-              </a:ext>
-            </a:extLst>
-          </p:cNvPr>
-          <p:cNvPicPr>
-            <a:picLocks noChangeAspect="1"/>
-          </p:cNvPicPr>
-          <p:nvPr/>
-        </p:nvPicPr>
-        <p:blipFill>
-          <a:blip r:embed="rId2"/>
-          <a:stretch>
-            <a:fillRect/>
-          </a:stretch>
-        </p:blipFill>
-        <p:spPr>
-          <a:xfrm>
-            <a:off x="0" y="0"/>
-            <a:ext cx="5715798" cy="3934374"/>
-          </a:xfrm>
-          <a:prstGeom prst="rect">
-            <a:avLst/>
-          </a:prstGeom>
-        </p:spPr>
-      </p:pic>
-      <p:sp>
-        <p:nvSpPr>
-          <p:cNvPr id="6" name="직사각형 5">
-            <a:extLst>
-              <a:ext uri="{FF2B5EF4-FFF2-40B4-BE49-F238E27FC236}">
-                <a16:creationId xmlns:a16="http://schemas.microsoft.com/office/drawing/2014/main" id="{DEB44C0B-0BBB-7A0E-DD9A-69CF8B190CA4}"/>
-              </a:ext>
-            </a:extLst>
-          </p:cNvPr>
-          <p:cNvSpPr/>
-          <p:nvPr/>
-        </p:nvSpPr>
-        <p:spPr>
-          <a:xfrm>
-            <a:off x="1559369" y="1967187"/>
-            <a:ext cx="394570" cy="400832"/>
-          </a:xfrm>
-          <a:prstGeom prst="rect">
-            <a:avLst/>
-          </a:prstGeom>
-          <a:noFill/>
-          <a:ln>
-            <a:solidFill>
-              <a:schemeClr val="bg1"/>
-            </a:solidFill>
-          </a:ln>
-        </p:spPr>
-        <p:style>
-          <a:lnRef idx="2">
-            <a:schemeClr val="accent1">
-              <a:shade val="15000"/>
-            </a:schemeClr>
-          </a:lnRef>
-          <a:fillRef idx="1">
-            <a:schemeClr val="accent1"/>
-          </a:fillRef>
-          <a:effectRef idx="0">
-            <a:schemeClr val="accent1"/>
-          </a:effectRef>
-          <a:fontRef idx="minor">
-            <a:schemeClr val="lt1"/>
-          </a:fontRef>
-        </p:style>
-        <p:txBody>
-          <a:bodyPr rtlCol="0" anchor="ctr"/>
-          <a:lstStyle/>
-          <a:p>
-            <a:pPr algn="ctr"/>
-            <a:endParaRPr lang="ko-KR" altLang="en-US"/>
-          </a:p>
-        </p:txBody>
-      </p:sp>
-      <p:cxnSp>
-        <p:nvCxnSpPr>
-          <p:cNvPr id="14" name="직선 연결선 13">
-            <a:extLst>
-              <a:ext uri="{FF2B5EF4-FFF2-40B4-BE49-F238E27FC236}">
-                <a16:creationId xmlns:a16="http://schemas.microsoft.com/office/drawing/2014/main" id="{50C21EBE-00A4-C165-0C24-48FEE9A14CC3}"/>
-              </a:ext>
-            </a:extLst>
-          </p:cNvPr>
-          <p:cNvCxnSpPr>
-            <a:cxnSpLocks/>
-          </p:cNvCxnSpPr>
-          <p:nvPr/>
-        </p:nvCxnSpPr>
-        <p:spPr>
-          <a:xfrm flipH="1">
-            <a:off x="1756654" y="958241"/>
-            <a:ext cx="5383182" cy="1209362"/>
-          </a:xfrm>
-          <a:prstGeom prst="line">
-            <a:avLst/>
-          </a:prstGeom>
-        </p:spPr>
-        <p:style>
-          <a:lnRef idx="2">
-            <a:schemeClr val="accent1"/>
-          </a:lnRef>
-          <a:fillRef idx="0">
-            <a:schemeClr val="accent1"/>
-          </a:fillRef>
-          <a:effectRef idx="1">
-            <a:schemeClr val="accent1"/>
-          </a:effectRef>
-          <a:fontRef idx="minor">
-            <a:schemeClr val="tx1"/>
-          </a:fontRef>
-        </p:style>
-      </p:cxnSp>
-      <p:pic>
-        <p:nvPicPr>
-          <p:cNvPr id="7" name="그림 6">
-            <a:extLst>
-              <a:ext uri="{FF2B5EF4-FFF2-40B4-BE49-F238E27FC236}">
-                <a16:creationId xmlns:a16="http://schemas.microsoft.com/office/drawing/2014/main" id="{2F371E6E-D0E8-B1DE-8F4E-4E5EB461DE96}"/>
-              </a:ext>
-            </a:extLst>
-          </p:cNvPr>
-          <p:cNvPicPr>
-            <a:picLocks noChangeAspect="1"/>
-          </p:cNvPicPr>
-          <p:nvPr/>
-        </p:nvPicPr>
-        <p:blipFill>
-          <a:blip r:embed="rId3"/>
-          <a:stretch>
-            <a:fillRect/>
-          </a:stretch>
-        </p:blipFill>
-        <p:spPr>
-          <a:xfrm>
-            <a:off x="6007510" y="293075"/>
-            <a:ext cx="6048792" cy="2395562"/>
-          </a:xfrm>
-          <a:prstGeom prst="rect">
-            <a:avLst/>
-          </a:prstGeom>
-        </p:spPr>
-      </p:pic>
-    </p:spTree>
-    <p:extLst>
-      <p:ext uri="{BB962C8B-B14F-4D97-AF65-F5344CB8AC3E}">
-        <p14:creationId xmlns:p14="http://schemas.microsoft.com/office/powerpoint/2010/main" val="2226476025"/>
-      </p:ext>
-    </p:extLst>
-  </p:cSld>
-  <p:clrMapOvr>
-    <a:masterClrMapping/>
-  </p:clrMapOvr>
-</p:sld>
-</file>
-
-<file path=ppt/slides/slide6.xml><?xml version="1.0" encoding="utf-8"?>
-<p:sld xmlns:a="http://schemas.openxmlformats.org/drawingml/2006/main" xmlns:r="http://schemas.openxmlformats.org/officeDocument/2006/relationships" xmlns:p="http://schemas.openxmlformats.org/presentationml/2006/main">
-  <p:cSld>
-    <p:spTree>
-      <p:nvGrpSpPr>
-        <p:cNvPr id="1" name="">
-          <a:extLst>
-            <a:ext uri="{FF2B5EF4-FFF2-40B4-BE49-F238E27FC236}">
-              <a16:creationId xmlns:a16="http://schemas.microsoft.com/office/drawing/2014/main" id="{FC736CBB-325F-D828-744A-B95AD5A74DFC}"/>
-            </a:ext>
-          </a:extLst>
-        </p:cNvPr>
-        <p:cNvGrpSpPr/>
-        <p:nvPr/>
-      </p:nvGrpSpPr>
-      <p:grpSpPr>
-        <a:xfrm>
-          <a:off x="0" y="0"/>
-          <a:ext cx="0" cy="0"/>
-          <a:chOff x="0" y="0"/>
-          <a:chExt cx="0" cy="0"/>
-        </a:xfrm>
-      </p:grpSpPr>
-      <p:pic>
-        <p:nvPicPr>
-          <p:cNvPr id="5" name="그림 4">
-            <a:extLst>
-              <a:ext uri="{FF2B5EF4-FFF2-40B4-BE49-F238E27FC236}">
-                <a16:creationId xmlns:a16="http://schemas.microsoft.com/office/drawing/2014/main" id="{A1F4BB87-B6CF-0D25-98C3-9C7D3C95A1C4}"/>
-              </a:ext>
-            </a:extLst>
-          </p:cNvPr>
-          <p:cNvPicPr>
-            <a:picLocks noChangeAspect="1"/>
-          </p:cNvPicPr>
-          <p:nvPr/>
-        </p:nvPicPr>
-        <p:blipFill>
-          <a:blip r:embed="rId2"/>
-          <a:stretch>
-            <a:fillRect/>
-          </a:stretch>
-        </p:blipFill>
-        <p:spPr>
-          <a:xfrm>
-            <a:off x="0" y="0"/>
-            <a:ext cx="5715798" cy="3934374"/>
-          </a:xfrm>
-          <a:prstGeom prst="rect">
-            <a:avLst/>
-          </a:prstGeom>
-        </p:spPr>
-      </p:pic>
-      <p:sp>
-        <p:nvSpPr>
-          <p:cNvPr id="6" name="직사각형 5">
-            <a:extLst>
-              <a:ext uri="{FF2B5EF4-FFF2-40B4-BE49-F238E27FC236}">
-                <a16:creationId xmlns:a16="http://schemas.microsoft.com/office/drawing/2014/main" id="{6377DA0B-A0C6-E24E-D919-362ED37856D3}"/>
-              </a:ext>
-            </a:extLst>
-          </p:cNvPr>
-          <p:cNvSpPr/>
-          <p:nvPr/>
-        </p:nvSpPr>
-        <p:spPr>
-          <a:xfrm>
-            <a:off x="2085462" y="1967187"/>
-            <a:ext cx="394570" cy="400832"/>
-          </a:xfrm>
-          <a:prstGeom prst="rect">
-            <a:avLst/>
-          </a:prstGeom>
-          <a:noFill/>
-          <a:ln>
-            <a:solidFill>
-              <a:schemeClr val="bg1"/>
-            </a:solidFill>
-          </a:ln>
-        </p:spPr>
-        <p:style>
-          <a:lnRef idx="2">
-            <a:schemeClr val="accent1">
-              <a:shade val="15000"/>
-            </a:schemeClr>
-          </a:lnRef>
-          <a:fillRef idx="1">
-            <a:schemeClr val="accent1"/>
-          </a:fillRef>
-          <a:effectRef idx="0">
-            <a:schemeClr val="accent1"/>
-          </a:effectRef>
-          <a:fontRef idx="minor">
-            <a:schemeClr val="lt1"/>
-          </a:fontRef>
-        </p:style>
-        <p:txBody>
-          <a:bodyPr rtlCol="0" anchor="ctr"/>
-          <a:lstStyle/>
-          <a:p>
-            <a:pPr algn="ctr"/>
-            <a:endParaRPr lang="ko-KR" altLang="en-US"/>
-          </a:p>
-        </p:txBody>
-      </p:sp>
-      <p:cxnSp>
-        <p:nvCxnSpPr>
-          <p:cNvPr id="14" name="직선 연결선 13">
-            <a:extLst>
-              <a:ext uri="{FF2B5EF4-FFF2-40B4-BE49-F238E27FC236}">
-                <a16:creationId xmlns:a16="http://schemas.microsoft.com/office/drawing/2014/main" id="{C9CD2E3E-A5A1-3070-DFDC-33EBF704A10B}"/>
-              </a:ext>
-            </a:extLst>
-          </p:cNvPr>
-          <p:cNvCxnSpPr>
-            <a:cxnSpLocks/>
-          </p:cNvCxnSpPr>
-          <p:nvPr/>
-        </p:nvCxnSpPr>
-        <p:spPr>
-          <a:xfrm flipH="1">
-            <a:off x="2282747" y="958241"/>
-            <a:ext cx="5383182" cy="1209362"/>
-          </a:xfrm>
-          <a:prstGeom prst="line">
-            <a:avLst/>
-          </a:prstGeom>
-        </p:spPr>
-        <p:style>
-          <a:lnRef idx="2">
-            <a:schemeClr val="accent1"/>
-          </a:lnRef>
-          <a:fillRef idx="0">
-            <a:schemeClr val="accent1"/>
-          </a:fillRef>
-          <a:effectRef idx="1">
-            <a:schemeClr val="accent1"/>
-          </a:effectRef>
-          <a:fontRef idx="minor">
-            <a:schemeClr val="tx1"/>
-          </a:fontRef>
-        </p:style>
-      </p:cxnSp>
-      <p:pic>
-        <p:nvPicPr>
-          <p:cNvPr id="3" name="그림 2">
-            <a:extLst>
-              <a:ext uri="{FF2B5EF4-FFF2-40B4-BE49-F238E27FC236}">
-                <a16:creationId xmlns:a16="http://schemas.microsoft.com/office/drawing/2014/main" id="{D0D55832-51FD-D703-3E5D-C6E1CAA6ACEE}"/>
-              </a:ext>
-            </a:extLst>
-          </p:cNvPr>
-          <p:cNvPicPr>
-            <a:picLocks noChangeAspect="1"/>
-          </p:cNvPicPr>
-          <p:nvPr/>
-        </p:nvPicPr>
-        <p:blipFill>
-          <a:blip r:embed="rId3"/>
-          <a:stretch>
-            <a:fillRect/>
-          </a:stretch>
-        </p:blipFill>
-        <p:spPr>
-          <a:xfrm>
-            <a:off x="6254919" y="230493"/>
-            <a:ext cx="5588440" cy="2283044"/>
-          </a:xfrm>
-          <a:prstGeom prst="rect">
-            <a:avLst/>
-          </a:prstGeom>
-        </p:spPr>
-      </p:pic>
-    </p:spTree>
-    <p:extLst>
-      <p:ext uri="{BB962C8B-B14F-4D97-AF65-F5344CB8AC3E}">
-        <p14:creationId xmlns:p14="http://schemas.microsoft.com/office/powerpoint/2010/main" val="132414227"/>
-      </p:ext>
-    </p:extLst>
-  </p:cSld>
-  <p:clrMapOvr>
-    <a:masterClrMapping/>
-  </p:clrMapOvr>
-</p:sld>
-</file>
-
-<file path=ppt/slides/slide7.xml><?xml version="1.0" encoding="utf-8"?>
 <p:sld xmlns:a="http://schemas.openxmlformats.org/drawingml/2006/main" xmlns:r="http://schemas.openxmlformats.org/officeDocument/2006/relationships" xmlns:p="http://schemas.openxmlformats.org/presentationml/2006/main">
   <p:cSld>
     <p:spTree>
@@ -4450,12 +3623,123 @@
           <a:chExt cx="0" cy="0"/>
         </a:xfrm>
       </p:grpSpPr>
+      <p:sp>
+        <p:nvSpPr>
+          <p:cNvPr id="8" name="TextBox 7">
+            <a:extLst>
+              <a:ext uri="{FF2B5EF4-FFF2-40B4-BE49-F238E27FC236}">
+                <a16:creationId xmlns:a16="http://schemas.microsoft.com/office/drawing/2014/main" id="{13273747-24A6-1AE9-AC13-8D7DF4712FD4}"/>
+              </a:ext>
+            </a:extLst>
+          </p:cNvPr>
+          <p:cNvSpPr txBox="1"/>
+          <p:nvPr/>
+        </p:nvSpPr>
+        <p:spPr>
+          <a:xfrm>
+            <a:off x="1121078" y="2202775"/>
+            <a:ext cx="2868460" cy="307777"/>
+          </a:xfrm>
+          <a:prstGeom prst="rect">
+            <a:avLst/>
+          </a:prstGeom>
+          <a:noFill/>
+        </p:spPr>
+        <p:txBody>
+          <a:bodyPr wrap="square" rtlCol="0">
+            <a:spAutoFit/>
+          </a:bodyPr>
+          <a:lstStyle/>
+          <a:p>
+            <a:pPr algn="ctr"/>
+            <a:r>
+              <a:rPr lang="en-US" altLang="ko-KR" sz="1400"/>
+              <a:t>Uncalib. Baseline R128 G43 B213</a:t>
+            </a:r>
+            <a:endParaRPr lang="ko-KR" altLang="en-US" sz="1400"/>
+          </a:p>
+        </p:txBody>
+      </p:sp>
+      <p:sp>
+        <p:nvSpPr>
+          <p:cNvPr id="12" name="TextBox 11">
+            <a:extLst>
+              <a:ext uri="{FF2B5EF4-FFF2-40B4-BE49-F238E27FC236}">
+                <a16:creationId xmlns:a16="http://schemas.microsoft.com/office/drawing/2014/main" id="{B4152FC9-5ADF-1A89-AACD-E1948A566D75}"/>
+              </a:ext>
+            </a:extLst>
+          </p:cNvPr>
+          <p:cNvSpPr txBox="1"/>
+          <p:nvPr/>
+        </p:nvSpPr>
+        <p:spPr>
+          <a:xfrm>
+            <a:off x="7502242" y="2202776"/>
+            <a:ext cx="2868460" cy="307777"/>
+          </a:xfrm>
+          <a:prstGeom prst="rect">
+            <a:avLst/>
+          </a:prstGeom>
+          <a:noFill/>
+        </p:spPr>
+        <p:txBody>
+          <a:bodyPr wrap="square" rtlCol="0">
+            <a:spAutoFit/>
+          </a:bodyPr>
+          <a:lstStyle/>
+          <a:p>
+            <a:pPr algn="ctr"/>
+            <a:r>
+              <a:rPr lang="en-US" altLang="ko-KR" sz="1400"/>
+              <a:t>Calibrated R224 G112 B192</a:t>
+            </a:r>
+            <a:endParaRPr lang="ko-KR" altLang="en-US" sz="1400"/>
+          </a:p>
+        </p:txBody>
+      </p:sp>
+      <p:sp>
+        <p:nvSpPr>
+          <p:cNvPr id="17" name="TextBox 16">
+            <a:extLst>
+              <a:ext uri="{FF2B5EF4-FFF2-40B4-BE49-F238E27FC236}">
+                <a16:creationId xmlns:a16="http://schemas.microsoft.com/office/drawing/2014/main" id="{D3FC361A-002F-82E5-3E35-190BF1338EFB}"/>
+              </a:ext>
+            </a:extLst>
+          </p:cNvPr>
+          <p:cNvSpPr txBox="1"/>
+          <p:nvPr/>
+        </p:nvSpPr>
+        <p:spPr>
+          <a:xfrm>
+            <a:off x="4294342" y="2202776"/>
+            <a:ext cx="2868460" cy="307777"/>
+          </a:xfrm>
+          <a:prstGeom prst="rect">
+            <a:avLst/>
+          </a:prstGeom>
+          <a:noFill/>
+        </p:spPr>
+        <p:txBody>
+          <a:bodyPr wrap="square" rtlCol="0">
+            <a:spAutoFit/>
+          </a:bodyPr>
+          <a:lstStyle/>
+          <a:p>
+            <a:pPr algn="ctr"/>
+            <a:r>
+              <a:rPr lang="en-US" altLang="ko-KR" sz="1400"/>
+              <a:t>Virtual R128 G43 B213</a:t>
+            </a:r>
+            <a:endParaRPr lang="ko-KR" altLang="en-US" sz="1400"/>
+          </a:p>
+        </p:txBody>
+      </p:sp>
       <p:pic>
         <p:nvPicPr>
-          <p:cNvPr id="5" name="그림 4">
-            <a:extLst>
-              <a:ext uri="{FF2B5EF4-FFF2-40B4-BE49-F238E27FC236}">
-                <a16:creationId xmlns:a16="http://schemas.microsoft.com/office/drawing/2014/main" id="{82091AE7-82F0-F22C-ED61-50F71BBE82FE}"/>
+          <p:cNvPr id="19" name="그림 18">
+            <a:extLst>
+              <a:ext uri="{FF2B5EF4-FFF2-40B4-BE49-F238E27FC236}">
+                <a16:creationId xmlns:a16="http://schemas.microsoft.com/office/drawing/2014/main" id="{3655F8D9-D08F-6453-34C2-D0A00006D9FF}"/>
               </a:ext>
             </a:extLst>
           </p:cNvPr>
@@ -4472,110 +3756,20 @@
         </p:blipFill>
         <p:spPr>
           <a:xfrm>
-            <a:off x="0" y="0"/>
-            <a:ext cx="5715798" cy="3934374"/>
+            <a:off x="1121078" y="230298"/>
+            <a:ext cx="2868460" cy="1972477"/>
           </a:xfrm>
           <a:prstGeom prst="rect">
             <a:avLst/>
           </a:prstGeom>
         </p:spPr>
       </p:pic>
-      <p:sp>
-        <p:nvSpPr>
-          <p:cNvPr id="6" name="직사각형 5">
-            <a:extLst>
-              <a:ext uri="{FF2B5EF4-FFF2-40B4-BE49-F238E27FC236}">
-                <a16:creationId xmlns:a16="http://schemas.microsoft.com/office/drawing/2014/main" id="{96BB35B2-FD2F-4303-85B2-0E2E7DED5B23}"/>
-              </a:ext>
-            </a:extLst>
-          </p:cNvPr>
-          <p:cNvSpPr/>
-          <p:nvPr/>
-        </p:nvSpPr>
-        <p:spPr>
-          <a:xfrm>
-            <a:off x="2573977" y="2004765"/>
-            <a:ext cx="394570" cy="400832"/>
-          </a:xfrm>
-          <a:prstGeom prst="rect">
-            <a:avLst/>
-          </a:prstGeom>
-          <a:noFill/>
-          <a:ln>
-            <a:solidFill>
-              <a:schemeClr val="bg1"/>
-            </a:solidFill>
-          </a:ln>
-        </p:spPr>
-        <p:style>
-          <a:lnRef idx="2">
-            <a:schemeClr val="accent1">
-              <a:shade val="15000"/>
-            </a:schemeClr>
-          </a:lnRef>
-          <a:fillRef idx="1">
-            <a:schemeClr val="accent1"/>
-          </a:fillRef>
-          <a:effectRef idx="0">
-            <a:schemeClr val="accent1"/>
-          </a:effectRef>
-          <a:fontRef idx="minor">
-            <a:schemeClr val="lt1"/>
-          </a:fontRef>
-        </p:style>
-        <p:txBody>
-          <a:bodyPr rtlCol="0" anchor="ctr"/>
-          <a:lstStyle/>
-          <a:p>
-            <a:pPr algn="ctr"/>
-            <a:endParaRPr lang="ko-KR" altLang="en-US"/>
-          </a:p>
-        </p:txBody>
-      </p:sp>
-      <p:cxnSp>
-        <p:nvCxnSpPr>
-          <p:cNvPr id="14" name="직선 연결선 13">
-            <a:extLst>
-              <a:ext uri="{FF2B5EF4-FFF2-40B4-BE49-F238E27FC236}">
-                <a16:creationId xmlns:a16="http://schemas.microsoft.com/office/drawing/2014/main" id="{0BF8E234-BE44-5F6B-105D-5A326779D24F}"/>
-              </a:ext>
-            </a:extLst>
-          </p:cNvPr>
-          <p:cNvCxnSpPr>
-            <a:cxnSpLocks/>
-          </p:cNvCxnSpPr>
-          <p:nvPr/>
-        </p:nvCxnSpPr>
-        <p:spPr>
-          <a:xfrm flipH="1">
-            <a:off x="2771262" y="995819"/>
-            <a:ext cx="5383182" cy="1209362"/>
-          </a:xfrm>
-          <a:prstGeom prst="line">
-            <a:avLst/>
-          </a:prstGeom>
-        </p:spPr>
-        <p:style>
-          <a:lnRef idx="2">
-            <a:schemeClr val="accent1"/>
-          </a:lnRef>
-          <a:fillRef idx="0">
-            <a:schemeClr val="accent1"/>
-          </a:fillRef>
-          <a:effectRef idx="1">
-            <a:schemeClr val="accent1"/>
-          </a:effectRef>
-          <a:fontRef idx="minor">
-            <a:schemeClr val="tx1"/>
-          </a:fontRef>
-        </p:style>
-      </p:cxnSp>
       <p:pic>
         <p:nvPicPr>
-          <p:cNvPr id="3" name="그림 2">
-            <a:extLst>
-              <a:ext uri="{FF2B5EF4-FFF2-40B4-BE49-F238E27FC236}">
-                <a16:creationId xmlns:a16="http://schemas.microsoft.com/office/drawing/2014/main" id="{74738DFF-73C2-8349-C1EF-3241B7C9DF5C}"/>
+          <p:cNvPr id="21" name="그림 20">
+            <a:extLst>
+              <a:ext uri="{FF2B5EF4-FFF2-40B4-BE49-F238E27FC236}">
+                <a16:creationId xmlns:a16="http://schemas.microsoft.com/office/drawing/2014/main" id="{C7772780-B245-7EA6-D48D-45EC81F05EF9}"/>
               </a:ext>
             </a:extLst>
           </p:cNvPr>
@@ -4592,8 +3786,38 @@
         </p:blipFill>
         <p:spPr>
           <a:xfrm>
-            <a:off x="6212051" y="269591"/>
-            <a:ext cx="5481162" cy="2216826"/>
+            <a:off x="4294342" y="183051"/>
+            <a:ext cx="2868460" cy="2035376"/>
+          </a:xfrm>
+          <a:prstGeom prst="rect">
+            <a:avLst/>
+          </a:prstGeom>
+        </p:spPr>
+      </p:pic>
+      <p:pic>
+        <p:nvPicPr>
+          <p:cNvPr id="23" name="그림 22">
+            <a:extLst>
+              <a:ext uri="{FF2B5EF4-FFF2-40B4-BE49-F238E27FC236}">
+                <a16:creationId xmlns:a16="http://schemas.microsoft.com/office/drawing/2014/main" id="{97F42E80-0B41-4136-6639-D21A9B59D287}"/>
+              </a:ext>
+            </a:extLst>
+          </p:cNvPr>
+          <p:cNvPicPr>
+            <a:picLocks noChangeAspect="1"/>
+          </p:cNvPicPr>
+          <p:nvPr/>
+        </p:nvPicPr>
+        <p:blipFill>
+          <a:blip r:embed="rId4"/>
+          <a:stretch>
+            <a:fillRect/>
+          </a:stretch>
+        </p:blipFill>
+        <p:spPr>
+          <a:xfrm>
+            <a:off x="7467606" y="230298"/>
+            <a:ext cx="2937731" cy="1972477"/>
           </a:xfrm>
           <a:prstGeom prst="rect">
             <a:avLst/>
@@ -4613,115 +3837,7 @@
 </p:sld>
 </file>
 
-<file path=ppt/slides/slide8.xml><?xml version="1.0" encoding="utf-8"?>
-<p:sld xmlns:a="http://schemas.openxmlformats.org/drawingml/2006/main" xmlns:r="http://schemas.openxmlformats.org/officeDocument/2006/relationships" xmlns:p="http://schemas.openxmlformats.org/presentationml/2006/main">
-  <p:cSld>
-    <p:spTree>
-      <p:nvGrpSpPr>
-        <p:cNvPr id="1" name="">
-          <a:extLst>
-            <a:ext uri="{FF2B5EF4-FFF2-40B4-BE49-F238E27FC236}">
-              <a16:creationId xmlns:a16="http://schemas.microsoft.com/office/drawing/2014/main" id="{0A7FC834-58D4-C86F-FDFD-E0394045A27E}"/>
-            </a:ext>
-          </a:extLst>
-        </p:cNvPr>
-        <p:cNvGrpSpPr/>
-        <p:nvPr/>
-      </p:nvGrpSpPr>
-      <p:grpSpPr>
-        <a:xfrm>
-          <a:off x="0" y="0"/>
-          <a:ext cx="0" cy="0"/>
-          <a:chOff x="0" y="0"/>
-          <a:chExt cx="0" cy="0"/>
-        </a:xfrm>
-      </p:grpSpPr>
-      <p:pic>
-        <p:nvPicPr>
-          <p:cNvPr id="4" name="그림 3">
-            <a:extLst>
-              <a:ext uri="{FF2B5EF4-FFF2-40B4-BE49-F238E27FC236}">
-                <a16:creationId xmlns:a16="http://schemas.microsoft.com/office/drawing/2014/main" id="{F542D8F1-5474-6BCA-EBA3-EF182BEABA3C}"/>
-              </a:ext>
-            </a:extLst>
-          </p:cNvPr>
-          <p:cNvPicPr>
-            <a:picLocks noChangeAspect="1"/>
-          </p:cNvPicPr>
-          <p:nvPr/>
-        </p:nvPicPr>
-        <p:blipFill>
-          <a:blip r:embed="rId2">
-            <a:extLst>
-              <a:ext uri="{28A0092B-C50C-407E-A947-70E740481C1C}">
-                <a14:useLocalDpi xmlns:a14="http://schemas.microsoft.com/office/drawing/2010/main" val="0"/>
-              </a:ext>
-            </a:extLst>
-          </a:blip>
-          <a:stretch>
-            <a:fillRect/>
-          </a:stretch>
-        </p:blipFill>
-        <p:spPr>
-          <a:xfrm>
-            <a:off x="648222" y="364625"/>
-            <a:ext cx="10895556" cy="6128750"/>
-          </a:xfrm>
-          <a:prstGeom prst="rect">
-            <a:avLst/>
-          </a:prstGeom>
-        </p:spPr>
-      </p:pic>
-      <p:sp>
-        <p:nvSpPr>
-          <p:cNvPr id="7" name="TextBox 6">
-            <a:extLst>
-              <a:ext uri="{FF2B5EF4-FFF2-40B4-BE49-F238E27FC236}">
-                <a16:creationId xmlns:a16="http://schemas.microsoft.com/office/drawing/2014/main" id="{595AF5D8-541C-DD72-4D1D-AD5070FAE588}"/>
-              </a:ext>
-            </a:extLst>
-          </p:cNvPr>
-          <p:cNvSpPr txBox="1"/>
-          <p:nvPr/>
-        </p:nvSpPr>
-        <p:spPr>
-          <a:xfrm>
-            <a:off x="839244" y="6493375"/>
-            <a:ext cx="6983260" cy="369332"/>
-          </a:xfrm>
-          <a:prstGeom prst="rect">
-            <a:avLst/>
-          </a:prstGeom>
-          <a:noFill/>
-        </p:spPr>
-        <p:txBody>
-          <a:bodyPr wrap="square" rtlCol="0">
-            <a:spAutoFit/>
-          </a:bodyPr>
-          <a:lstStyle/>
-          <a:p>
-            <a:r>
-              <a:rPr lang="en-US" altLang="ko-KR"/>
-              <a:t>R: 255, G:0, B:0, Intensity: 255 </a:t>
-            </a:r>
-            <a:endParaRPr lang="ko-KR" altLang="en-US"/>
-          </a:p>
-        </p:txBody>
-      </p:sp>
-    </p:spTree>
-    <p:extLst>
-      <p:ext uri="{BB962C8B-B14F-4D97-AF65-F5344CB8AC3E}">
-        <p14:creationId xmlns:p14="http://schemas.microsoft.com/office/powerpoint/2010/main" val="1064654339"/>
-      </p:ext>
-    </p:extLst>
-  </p:cSld>
-  <p:clrMapOvr>
-    <a:masterClrMapping/>
-  </p:clrMapOvr>
-</p:sld>
-</file>
-
-<file path=ppt/slides/slide9.xml><?xml version="1.0" encoding="utf-8"?>
+<file path=ppt/slides/slide4.xml><?xml version="1.0" encoding="utf-8"?>
 <p:sld xmlns:a="http://schemas.openxmlformats.org/drawingml/2006/main" xmlns:r="http://schemas.openxmlformats.org/officeDocument/2006/relationships" xmlns:p="http://schemas.openxmlformats.org/presentationml/2006/main">
   <p:cSld>
     <p:spTree>
